--- a/1학기/웹 프로그래밍/2026_웹 프로그래밍_part5.pptx
+++ b/1학기/웹 프로그래밍/2026_웹 프로그래밍_part5.pptx
@@ -1,38 +1,38 @@
 
 <file path=ppt/presentation.xml><?xml version="1.0" encoding="utf-8"?>
-<p:presentation xmlns:a="http://schemas.openxmlformats.org/drawingml/2006/main" xmlns:r="http://schemas.openxmlformats.org/officeDocument/2006/relationships" xmlns:p="http://schemas.openxmlformats.org/presentationml/2006/main" saveSubsetFonts="1">
+<p:presentation xmlns:a="http://schemas.openxmlformats.org/drawingml/2006/main" xmlns:r="http://schemas.openxmlformats.org/officeDocument/2006/relationships" xmlns:p="http://schemas.openxmlformats.org/presentationml/2006/main" xmlns:p14="http://schemas.microsoft.com/office/powerpoint/2010/main" saveSubsetFonts="1">
   <p:sldMasterIdLst>
-    <p:sldMasterId id="2147483660" r:id="rId1"/>
+    <p:sldMasterId id="2147483669" r:id="rId5"/>
   </p:sldMasterIdLst>
   <p:notesMasterIdLst>
-    <p:notesMasterId r:id="rId25"/>
+    <p:notesMasterId r:id="rId7"/>
   </p:notesMasterIdLst>
   <p:sldIdLst>
-    <p:sldId id="256" r:id="rId2"/>
-    <p:sldId id="257" r:id="rId3"/>
-    <p:sldId id="258" r:id="rId4"/>
-    <p:sldId id="274" r:id="rId5"/>
-    <p:sldId id="275" r:id="rId6"/>
-    <p:sldId id="259" r:id="rId7"/>
-    <p:sldId id="260" r:id="rId8"/>
-    <p:sldId id="276" r:id="rId9"/>
-    <p:sldId id="261" r:id="rId10"/>
-    <p:sldId id="262" r:id="rId11"/>
-    <p:sldId id="277" r:id="rId12"/>
-    <p:sldId id="278" r:id="rId13"/>
-    <p:sldId id="279" r:id="rId14"/>
-    <p:sldId id="263" r:id="rId15"/>
-    <p:sldId id="264" r:id="rId16"/>
-    <p:sldId id="265" r:id="rId17"/>
-    <p:sldId id="266" r:id="rId18"/>
-    <p:sldId id="267" r:id="rId19"/>
-    <p:sldId id="268" r:id="rId20"/>
-    <p:sldId id="270" r:id="rId21"/>
-    <p:sldId id="271" r:id="rId22"/>
-    <p:sldId id="272" r:id="rId23"/>
-    <p:sldId id="273" r:id="rId24"/>
+    <p:sldId id="256" r:id="rId9"/>
+    <p:sldId id="257" r:id="rId10"/>
+    <p:sldId id="258" r:id="rId12"/>
+    <p:sldId id="274" r:id="rId14"/>
+    <p:sldId id="275" r:id="rId15"/>
+    <p:sldId id="259" r:id="rId16"/>
+    <p:sldId id="260" r:id="rId18"/>
+    <p:sldId id="276" r:id="rId20"/>
+    <p:sldId id="261" r:id="rId21"/>
+    <p:sldId id="262" r:id="rId23"/>
+    <p:sldId id="277" r:id="rId25"/>
+    <p:sldId id="278" r:id="rId26"/>
+    <p:sldId id="279" r:id="rId27"/>
+    <p:sldId id="263" r:id="rId28"/>
+    <p:sldId id="264" r:id="rId30"/>
+    <p:sldId id="265" r:id="rId32"/>
+    <p:sldId id="266" r:id="rId34"/>
+    <p:sldId id="267" r:id="rId36"/>
+    <p:sldId id="268" r:id="rId38"/>
+    <p:sldId id="270" r:id="rId39"/>
+    <p:sldId id="271" r:id="rId41"/>
+    <p:sldId id="272" r:id="rId43"/>
+    <p:sldId id="273" r:id="rId45"/>
   </p:sldIdLst>
-  <p:sldSz cx="9144000" cy="6858000" type="screen4x3"/>
+  <p:sldSz cx="9144000" cy="6858000"/>
   <p:notesSz cx="6858000" cy="9144000"/>
   <p:defaultTextStyle>
     <a:defPPr>
@@ -132,12 +132,12 @@
   <p:extLst>
     <p:ext uri="{EFAFB233-063F-42B5-8137-9DF3F51BA10A}">
       <p15:sldGuideLst xmlns:p15="http://schemas.microsoft.com/office/powerpoint/2012/main">
-        <p15:guide id="1" orient="horz" pos="2160">
+        <p15:guide id="1" orient="horz" pos="2157" userDrawn="0">
           <p15:clr>
             <a:srgbClr val="A4A3A4"/>
           </p15:clr>
         </p15:guide>
-        <p15:guide id="2" pos="2880">
+        <p15:guide id="2" pos="2877" userDrawn="0">
           <p15:clr>
             <a:srgbClr val="A4A3A4"/>
           </p15:clr>
@@ -146,6 +146,32 @@
     </p:ext>
   </p:extLst>
 </p:presentation>
+</file>
+
+<file path=ppt/ink/ink1.xml><?xml version="1.0" encoding="utf-8"?>
+<inkml:ink xmlns:inkml="http://www.w3.org/2003/InkML">
+  <inkml:definitions>
+    <inkml:context xml:id="ctx0">
+      <inkml:inkSource xml:id="inkSrc0">
+        <inkml:traceFormat>
+          <inkml:channel name="X" type="integer" max="3200" units="cm"/>
+          <inkml:channel name="Y" type="integer" max="1080" units="cm"/>
+        </inkml:traceFormat>
+        <inkml:channelProperties>
+          <inkml:channelProperty channel="X" name="resolution" value="66.666656" units="1/cm"/>
+          <inkml:channelProperty channel="Y" name="resolution" value="40.000000" units="1/cm"/>
+        </inkml:channelProperties>
+      </inkml:inkSource>
+    </inkml:context>
+    <inkml:brush xml:id="br0">
+      <inkml:brushProperty name="width" value="0.035278" units="cm"/>
+      <inkml:brushProperty name="height" value="0.035278" units="cm"/>
+      <inkml:brushProperty name="color" value="#ff0000"/>
+      <inkml:brushProperty name="fitToCurve" value="1"/>
+    </inkml:brush>
+  </inkml:definitions>
+  <inkml:trace contextRef="#ctx0" brushRef="#br0">1732 311,'-44'0,"-1"22,-43 89,-46 22,68-66,-68 88,90-66,-23-22,23-1,-1 23,1-44,-45 110,45-88,21 22,1-23,0 1,-45 66,45-66,0-45,0 67,0-67,22 0,0 23,0-23,0 0,0 1,0-1,0 0,22-22,0 0,22 0,1-22,-23 0,45-1,-45 1,0 0,23 22,-23-22,0-1,0 1,0 22,1-22,-1 22,0-22,0 0,23-1,-23 1,22 0,-21 0,-1 0,0-1,0 1,0 0,1 22,-23-22,22 22,-22-23,22 23,-22-22,22 0,0 0,1 22,-23-22,0-1,22 23,0-22,0 0,1 22,-1-22,22 22,-22 0,23-23,-1 23,-21-22,21 22,0 0,-44-22,45 22,-23 0,0 0,0 0,1 0,-1 0,-22-22,0 0,-22 22,-1-23,-21 23,22-22,-111-44,66 21,-44 1,-111-90,88 68,23 21,-111-88,89 66,44-21,-44 21,-23-22,90 45,21-1,1 45,-1-22,23 0,0 0,0 22,-1 0,1 0,0 0,0 0,0 0,22 22,0 0,0 0,22 0,0-22,0 23,23 21,-1-22,45 89,-22-66,-45-23,44 22,-21 1,21-1,1 23,-22-45,21 23,1-23,-1 0,23 22,-22 1,-23-23,23 0,-23-22,-21 22,-1-22,22 0,-21 0,-1 0,0 0,0 0,0 23,-22-1,23-22,-1 0,-22 22,22 0,-22 1,22-23,0 22,-22 0,23 0,-23 0,22 1,-22 21,0-22,22-22,-22 22,22 1,-22-1,0 0,0 0,0 1,0-1,0 0,0 0,0 0,23-22,-23 23,0-1,22-22,0 0,-22 22,0 0,0 1,22-23,-22 22,22-22,-22 22,23-22,-23 22,0 0,0 1,0-46,0 1,0 0,0-22,0 21,0-21,0 22,0-23,0 1,0 22,0-1,0-43,0 43,-23 1,23-22,0-1,-22 1,-22-67,22 66,-1-21,23-67,-22 88,0-22,22 23,0 22,-22-67,-1 45,23-1,0 23,0 0,0-23,0 23,0-22,0 21,0 1,0 0,-22 0,22-23,-22 45,22-22,0 0,0 0,-22-1,22 1,-22-22,22 22,0-1,0 1,0 0,-23 0,1 0,0 22,22 0</inkml:trace>
+</inkml:ink>
 </file>
 
 <file path=ppt/notesMasters/notesMaster1.xml><?xml version="1.0" encoding="utf-8"?>
@@ -497,7 +523,735 @@
 </p:notesMaster>
 </file>
 
-<file path=ppt/notesSlides/notesSlide1.xml><?xml version="1.0" encoding="utf-8"?>
+<file path=ppt/notesSlides/notesSlide10.xml><?xml version="1.0" encoding="utf-8"?>
+<p:notes xmlns:a="http://schemas.openxmlformats.org/drawingml/2006/main" xmlns:r="http://schemas.openxmlformats.org/officeDocument/2006/relationships" xmlns:p="http://schemas.openxmlformats.org/presentationml/2006/main" showMasterSp="0" showMasterPhAnim="0">
+  <p:cSld>
+    <p:spTree>
+      <p:nvGrpSpPr>
+        <p:cNvPr id="1" name="Shape 85"/>
+        <p:cNvGrpSpPr/>
+        <p:nvPr/>
+      </p:nvGrpSpPr>
+      <p:grpSpPr>
+        <a:xfrm>
+          <a:off x="0" y="0"/>
+          <a:ext cx="0" cy="0"/>
+          <a:chOff x="0" y="0"/>
+          <a:chExt cx="0" cy="0"/>
+        </a:xfrm>
+      </p:grpSpPr>
+      <p:sp>
+        <p:nvSpPr>
+          <p:cNvPr id="86" name="Google Shape;86;p7:notes"/>
+          <p:cNvSpPr txBox="1">
+            <a:spLocks noGrp="1"/>
+          </p:cNvSpPr>
+          <p:nvPr>
+            <p:ph type="body" idx="1"/>
+          </p:nvPr>
+        </p:nvSpPr>
+        <p:spPr>
+          <a:xfrm>
+            <a:off x="685800" y="4343400"/>
+            <a:ext cx="5486400" cy="4114800"/>
+          </a:xfrm>
+          <a:prstGeom prst="rect">
+            <a:avLst/>
+          </a:prstGeom>
+        </p:spPr>
+        <p:txBody>
+          <a:bodyPr spcFirstLastPara="1" wrap="square" lIns="91425" tIns="91425" rIns="91425" bIns="91425" anchor="t" anchorCtr="0">
+            <a:noAutofit/>
+          </a:bodyPr>
+          <a:lstStyle/>
+          <a:p>
+            <a:pPr marL="0" lvl="0" indent="0" algn="l" rtl="0">
+              <a:spcBef>
+                <a:spcPts val="0"/>
+              </a:spcBef>
+              <a:spcAft>
+                <a:spcPts val="0"/>
+              </a:spcAft>
+              <a:buNone/>
+            </a:pPr>
+            <a:endParaRPr/>
+          </a:p>
+        </p:txBody>
+      </p:sp>
+      <p:sp>
+        <p:nvSpPr>
+          <p:cNvPr id="87" name="Google Shape;87;p7:notes"/>
+          <p:cNvSpPr>
+            <a:spLocks noGrp="1" noRot="1" noChangeAspect="1"/>
+          </p:cNvSpPr>
+          <p:nvPr>
+            <p:ph type="sldImg" idx="2"/>
+          </p:nvPr>
+        </p:nvSpPr>
+        <p:spPr>
+          <a:xfrm>
+            <a:off x="1143000" y="685800"/>
+            <a:ext cx="4572000" cy="3429000"/>
+          </a:xfrm>
+          <a:custGeom>
+            <a:avLst/>
+            <a:gdLst/>
+            <a:ahLst/>
+            <a:cxnLst/>
+            <a:rect l="l" t="t" r="r" b="b"/>
+            <a:pathLst>
+              <a:path w="120000" h="120000" extrusionOk="0">
+                <a:moveTo>
+                  <a:pt x="0" y="0"/>
+                </a:moveTo>
+                <a:lnTo>
+                  <a:pt x="120000" y="0"/>
+                </a:lnTo>
+                <a:lnTo>
+                  <a:pt x="120000" y="120000"/>
+                </a:lnTo>
+                <a:lnTo>
+                  <a:pt x="0" y="120000"/>
+                </a:lnTo>
+                <a:close/>
+              </a:path>
+            </a:pathLst>
+          </a:custGeom>
+        </p:spPr>
+      </p:sp>
+    </p:spTree>
+  </p:cSld>
+  <p:clrMapOvr>
+    <a:masterClrMapping/>
+  </p:clrMapOvr>
+</p:notes>
+</file>
+
+<file path=ppt/notesSlides/notesSlide14.xml><?xml version="1.0" encoding="utf-8"?>
+<p:notes xmlns:a="http://schemas.openxmlformats.org/drawingml/2006/main" xmlns:r="http://schemas.openxmlformats.org/officeDocument/2006/relationships" xmlns:p="http://schemas.openxmlformats.org/presentationml/2006/main" showMasterSp="0" showMasterPhAnim="0">
+  <p:cSld>
+    <p:spTree>
+      <p:nvGrpSpPr>
+        <p:cNvPr id="1" name="Shape 95"/>
+        <p:cNvGrpSpPr/>
+        <p:nvPr/>
+      </p:nvGrpSpPr>
+      <p:grpSpPr>
+        <a:xfrm>
+          <a:off x="0" y="0"/>
+          <a:ext cx="0" cy="0"/>
+          <a:chOff x="0" y="0"/>
+          <a:chExt cx="0" cy="0"/>
+        </a:xfrm>
+      </p:grpSpPr>
+      <p:sp>
+        <p:nvSpPr>
+          <p:cNvPr id="96" name="Google Shape;96;p8:notes"/>
+          <p:cNvSpPr txBox="1">
+            <a:spLocks noGrp="1"/>
+          </p:cNvSpPr>
+          <p:nvPr>
+            <p:ph type="body" idx="1"/>
+          </p:nvPr>
+        </p:nvSpPr>
+        <p:spPr>
+          <a:xfrm>
+            <a:off x="685800" y="4343400"/>
+            <a:ext cx="5486400" cy="4114800"/>
+          </a:xfrm>
+          <a:prstGeom prst="rect">
+            <a:avLst/>
+          </a:prstGeom>
+        </p:spPr>
+        <p:txBody>
+          <a:bodyPr spcFirstLastPara="1" wrap="square" lIns="91425" tIns="91425" rIns="91425" bIns="91425" anchor="t" anchorCtr="0">
+            <a:noAutofit/>
+          </a:bodyPr>
+          <a:lstStyle/>
+          <a:p>
+            <a:pPr marL="0" lvl="0" indent="0" algn="l" rtl="0">
+              <a:spcBef>
+                <a:spcPts val="0"/>
+              </a:spcBef>
+              <a:spcAft>
+                <a:spcPts val="0"/>
+              </a:spcAft>
+              <a:buNone/>
+            </a:pPr>
+            <a:endParaRPr/>
+          </a:p>
+        </p:txBody>
+      </p:sp>
+      <p:sp>
+        <p:nvSpPr>
+          <p:cNvPr id="97" name="Google Shape;97;p8:notes"/>
+          <p:cNvSpPr>
+            <a:spLocks noGrp="1" noRot="1" noChangeAspect="1"/>
+          </p:cNvSpPr>
+          <p:nvPr>
+            <p:ph type="sldImg" idx="2"/>
+          </p:nvPr>
+        </p:nvSpPr>
+        <p:spPr>
+          <a:xfrm>
+            <a:off x="1143000" y="685800"/>
+            <a:ext cx="4572000" cy="3429000"/>
+          </a:xfrm>
+          <a:custGeom>
+            <a:avLst/>
+            <a:gdLst/>
+            <a:ahLst/>
+            <a:cxnLst/>
+            <a:rect l="l" t="t" r="r" b="b"/>
+            <a:pathLst>
+              <a:path w="120000" h="120000" extrusionOk="0">
+                <a:moveTo>
+                  <a:pt x="0" y="0"/>
+                </a:moveTo>
+                <a:lnTo>
+                  <a:pt x="120000" y="0"/>
+                </a:lnTo>
+                <a:lnTo>
+                  <a:pt x="120000" y="120000"/>
+                </a:lnTo>
+                <a:lnTo>
+                  <a:pt x="0" y="120000"/>
+                </a:lnTo>
+                <a:close/>
+              </a:path>
+            </a:pathLst>
+          </a:custGeom>
+        </p:spPr>
+      </p:sp>
+    </p:spTree>
+  </p:cSld>
+  <p:clrMapOvr>
+    <a:masterClrMapping/>
+  </p:clrMapOvr>
+</p:notes>
+</file>
+
+<file path=ppt/notesSlides/notesSlide15.xml><?xml version="1.0" encoding="utf-8"?>
+<p:notes xmlns:a="http://schemas.openxmlformats.org/drawingml/2006/main" xmlns:r="http://schemas.openxmlformats.org/officeDocument/2006/relationships" xmlns:p="http://schemas.openxmlformats.org/presentationml/2006/main" showMasterSp="0" showMasterPhAnim="0">
+  <p:cSld>
+    <p:spTree>
+      <p:nvGrpSpPr>
+        <p:cNvPr id="1" name="Shape 105"/>
+        <p:cNvGrpSpPr/>
+        <p:nvPr/>
+      </p:nvGrpSpPr>
+      <p:grpSpPr>
+        <a:xfrm>
+          <a:off x="0" y="0"/>
+          <a:ext cx="0" cy="0"/>
+          <a:chOff x="0" y="0"/>
+          <a:chExt cx="0" cy="0"/>
+        </a:xfrm>
+      </p:grpSpPr>
+      <p:sp>
+        <p:nvSpPr>
+          <p:cNvPr id="106" name="Google Shape;106;p9:notes"/>
+          <p:cNvSpPr txBox="1">
+            <a:spLocks noGrp="1"/>
+          </p:cNvSpPr>
+          <p:nvPr>
+            <p:ph type="body" idx="1"/>
+          </p:nvPr>
+        </p:nvSpPr>
+        <p:spPr>
+          <a:xfrm>
+            <a:off x="685800" y="4343400"/>
+            <a:ext cx="5486400" cy="4114800"/>
+          </a:xfrm>
+          <a:prstGeom prst="rect">
+            <a:avLst/>
+          </a:prstGeom>
+        </p:spPr>
+        <p:txBody>
+          <a:bodyPr spcFirstLastPara="1" wrap="square" lIns="91425" tIns="91425" rIns="91425" bIns="91425" anchor="t" anchorCtr="0">
+            <a:noAutofit/>
+          </a:bodyPr>
+          <a:lstStyle/>
+          <a:p>
+            <a:pPr marL="0" lvl="0" indent="0" algn="l" rtl="0">
+              <a:spcBef>
+                <a:spcPts val="0"/>
+              </a:spcBef>
+              <a:spcAft>
+                <a:spcPts val="0"/>
+              </a:spcAft>
+              <a:buNone/>
+            </a:pPr>
+            <a:endParaRPr/>
+          </a:p>
+        </p:txBody>
+      </p:sp>
+      <p:sp>
+        <p:nvSpPr>
+          <p:cNvPr id="107" name="Google Shape;107;p9:notes"/>
+          <p:cNvSpPr>
+            <a:spLocks noGrp="1" noRot="1" noChangeAspect="1"/>
+          </p:cNvSpPr>
+          <p:nvPr>
+            <p:ph type="sldImg" idx="2"/>
+          </p:nvPr>
+        </p:nvSpPr>
+        <p:spPr>
+          <a:xfrm>
+            <a:off x="1143000" y="685800"/>
+            <a:ext cx="4572000" cy="3429000"/>
+          </a:xfrm>
+          <a:custGeom>
+            <a:avLst/>
+            <a:gdLst/>
+            <a:ahLst/>
+            <a:cxnLst/>
+            <a:rect l="l" t="t" r="r" b="b"/>
+            <a:pathLst>
+              <a:path w="120000" h="120000" extrusionOk="0">
+                <a:moveTo>
+                  <a:pt x="0" y="0"/>
+                </a:moveTo>
+                <a:lnTo>
+                  <a:pt x="120000" y="0"/>
+                </a:lnTo>
+                <a:lnTo>
+                  <a:pt x="120000" y="120000"/>
+                </a:lnTo>
+                <a:lnTo>
+                  <a:pt x="0" y="120000"/>
+                </a:lnTo>
+                <a:close/>
+              </a:path>
+            </a:pathLst>
+          </a:custGeom>
+        </p:spPr>
+      </p:sp>
+    </p:spTree>
+  </p:cSld>
+  <p:clrMapOvr>
+    <a:masterClrMapping/>
+  </p:clrMapOvr>
+</p:notes>
+</file>
+
+<file path=ppt/notesSlides/notesSlide16.xml><?xml version="1.0" encoding="utf-8"?>
+<p:notes xmlns:a="http://schemas.openxmlformats.org/drawingml/2006/main" xmlns:r="http://schemas.openxmlformats.org/officeDocument/2006/relationships" xmlns:p="http://schemas.openxmlformats.org/presentationml/2006/main" showMasterSp="0" showMasterPhAnim="0">
+  <p:cSld>
+    <p:spTree>
+      <p:nvGrpSpPr>
+        <p:cNvPr id="1" name="Shape 114"/>
+        <p:cNvGrpSpPr/>
+        <p:nvPr/>
+      </p:nvGrpSpPr>
+      <p:grpSpPr>
+        <a:xfrm>
+          <a:off x="0" y="0"/>
+          <a:ext cx="0" cy="0"/>
+          <a:chOff x="0" y="0"/>
+          <a:chExt cx="0" cy="0"/>
+        </a:xfrm>
+      </p:grpSpPr>
+      <p:sp>
+        <p:nvSpPr>
+          <p:cNvPr id="115" name="Google Shape;115;p10:notes"/>
+          <p:cNvSpPr txBox="1">
+            <a:spLocks noGrp="1"/>
+          </p:cNvSpPr>
+          <p:nvPr>
+            <p:ph type="body" idx="1"/>
+          </p:nvPr>
+        </p:nvSpPr>
+        <p:spPr>
+          <a:xfrm>
+            <a:off x="685800" y="4343400"/>
+            <a:ext cx="5486400" cy="4114800"/>
+          </a:xfrm>
+          <a:prstGeom prst="rect">
+            <a:avLst/>
+          </a:prstGeom>
+        </p:spPr>
+        <p:txBody>
+          <a:bodyPr spcFirstLastPara="1" wrap="square" lIns="91425" tIns="91425" rIns="91425" bIns="91425" anchor="t" anchorCtr="0">
+            <a:noAutofit/>
+          </a:bodyPr>
+          <a:lstStyle/>
+          <a:p>
+            <a:pPr marL="0" lvl="0" indent="0" algn="l" rtl="0">
+              <a:spcBef>
+                <a:spcPts val="0"/>
+              </a:spcBef>
+              <a:spcAft>
+                <a:spcPts val="0"/>
+              </a:spcAft>
+              <a:buNone/>
+            </a:pPr>
+            <a:endParaRPr/>
+          </a:p>
+        </p:txBody>
+      </p:sp>
+      <p:sp>
+        <p:nvSpPr>
+          <p:cNvPr id="116" name="Google Shape;116;p10:notes"/>
+          <p:cNvSpPr>
+            <a:spLocks noGrp="1" noRot="1" noChangeAspect="1"/>
+          </p:cNvSpPr>
+          <p:nvPr>
+            <p:ph type="sldImg" idx="2"/>
+          </p:nvPr>
+        </p:nvSpPr>
+        <p:spPr>
+          <a:xfrm>
+            <a:off x="1143000" y="685800"/>
+            <a:ext cx="4572000" cy="3429000"/>
+          </a:xfrm>
+          <a:custGeom>
+            <a:avLst/>
+            <a:gdLst/>
+            <a:ahLst/>
+            <a:cxnLst/>
+            <a:rect l="l" t="t" r="r" b="b"/>
+            <a:pathLst>
+              <a:path w="120000" h="120000" extrusionOk="0">
+                <a:moveTo>
+                  <a:pt x="0" y="0"/>
+                </a:moveTo>
+                <a:lnTo>
+                  <a:pt x="120000" y="0"/>
+                </a:lnTo>
+                <a:lnTo>
+                  <a:pt x="120000" y="120000"/>
+                </a:lnTo>
+                <a:lnTo>
+                  <a:pt x="0" y="120000"/>
+                </a:lnTo>
+                <a:close/>
+              </a:path>
+            </a:pathLst>
+          </a:custGeom>
+        </p:spPr>
+      </p:sp>
+    </p:spTree>
+  </p:cSld>
+  <p:clrMapOvr>
+    <a:masterClrMapping/>
+  </p:clrMapOvr>
+</p:notes>
+</file>
+
+<file path=ppt/notesSlides/notesSlide17.xml><?xml version="1.0" encoding="utf-8"?>
+<p:notes xmlns:a="http://schemas.openxmlformats.org/drawingml/2006/main" xmlns:r="http://schemas.openxmlformats.org/officeDocument/2006/relationships" xmlns:p="http://schemas.openxmlformats.org/presentationml/2006/main" showMasterSp="0" showMasterPhAnim="0">
+  <p:cSld>
+    <p:spTree>
+      <p:nvGrpSpPr>
+        <p:cNvPr id="1" name="Shape 124"/>
+        <p:cNvGrpSpPr/>
+        <p:nvPr/>
+      </p:nvGrpSpPr>
+      <p:grpSpPr>
+        <a:xfrm>
+          <a:off x="0" y="0"/>
+          <a:ext cx="0" cy="0"/>
+          <a:chOff x="0" y="0"/>
+          <a:chExt cx="0" cy="0"/>
+        </a:xfrm>
+      </p:grpSpPr>
+      <p:sp>
+        <p:nvSpPr>
+          <p:cNvPr id="125" name="Google Shape;125;p11:notes"/>
+          <p:cNvSpPr txBox="1">
+            <a:spLocks noGrp="1"/>
+          </p:cNvSpPr>
+          <p:nvPr>
+            <p:ph type="body" idx="1"/>
+          </p:nvPr>
+        </p:nvSpPr>
+        <p:spPr>
+          <a:xfrm>
+            <a:off x="685800" y="4343400"/>
+            <a:ext cx="5486400" cy="4114800"/>
+          </a:xfrm>
+          <a:prstGeom prst="rect">
+            <a:avLst/>
+          </a:prstGeom>
+        </p:spPr>
+        <p:txBody>
+          <a:bodyPr spcFirstLastPara="1" wrap="square" lIns="91425" tIns="91425" rIns="91425" bIns="91425" anchor="t" anchorCtr="0">
+            <a:noAutofit/>
+          </a:bodyPr>
+          <a:lstStyle/>
+          <a:p>
+            <a:pPr marL="0" lvl="0" indent="0" algn="l" rtl="0">
+              <a:spcBef>
+                <a:spcPts val="0"/>
+              </a:spcBef>
+              <a:spcAft>
+                <a:spcPts val="0"/>
+              </a:spcAft>
+              <a:buNone/>
+            </a:pPr>
+            <a:endParaRPr/>
+          </a:p>
+        </p:txBody>
+      </p:sp>
+      <p:sp>
+        <p:nvSpPr>
+          <p:cNvPr id="126" name="Google Shape;126;p11:notes"/>
+          <p:cNvSpPr>
+            <a:spLocks noGrp="1" noRot="1" noChangeAspect="1"/>
+          </p:cNvSpPr>
+          <p:nvPr>
+            <p:ph type="sldImg" idx="2"/>
+          </p:nvPr>
+        </p:nvSpPr>
+        <p:spPr>
+          <a:xfrm>
+            <a:off x="1143000" y="685800"/>
+            <a:ext cx="4572000" cy="3429000"/>
+          </a:xfrm>
+          <a:custGeom>
+            <a:avLst/>
+            <a:gdLst/>
+            <a:ahLst/>
+            <a:cxnLst/>
+            <a:rect l="l" t="t" r="r" b="b"/>
+            <a:pathLst>
+              <a:path w="120000" h="120000" extrusionOk="0">
+                <a:moveTo>
+                  <a:pt x="0" y="0"/>
+                </a:moveTo>
+                <a:lnTo>
+                  <a:pt x="120000" y="0"/>
+                </a:lnTo>
+                <a:lnTo>
+                  <a:pt x="120000" y="120000"/>
+                </a:lnTo>
+                <a:lnTo>
+                  <a:pt x="0" y="120000"/>
+                </a:lnTo>
+                <a:close/>
+              </a:path>
+            </a:pathLst>
+          </a:custGeom>
+        </p:spPr>
+      </p:sp>
+    </p:spTree>
+  </p:cSld>
+  <p:clrMapOvr>
+    <a:masterClrMapping/>
+  </p:clrMapOvr>
+</p:notes>
+</file>
+
+<file path=ppt/notesSlides/notesSlide18.xml><?xml version="1.0" encoding="utf-8"?>
+<p:notes xmlns:a="http://schemas.openxmlformats.org/drawingml/2006/main" xmlns:r="http://schemas.openxmlformats.org/officeDocument/2006/relationships" xmlns:p="http://schemas.openxmlformats.org/presentationml/2006/main" showMasterSp="0" showMasterPhAnim="0">
+  <p:cSld>
+    <p:spTree>
+      <p:nvGrpSpPr>
+        <p:cNvPr id="1" name="Shape 133"/>
+        <p:cNvGrpSpPr/>
+        <p:nvPr/>
+      </p:nvGrpSpPr>
+      <p:grpSpPr>
+        <a:xfrm>
+          <a:off x="0" y="0"/>
+          <a:ext cx="0" cy="0"/>
+          <a:chOff x="0" y="0"/>
+          <a:chExt cx="0" cy="0"/>
+        </a:xfrm>
+      </p:grpSpPr>
+      <p:sp>
+        <p:nvSpPr>
+          <p:cNvPr id="134" name="Google Shape;134;p12:notes"/>
+          <p:cNvSpPr txBox="1">
+            <a:spLocks noGrp="1"/>
+          </p:cNvSpPr>
+          <p:nvPr>
+            <p:ph type="body" idx="1"/>
+          </p:nvPr>
+        </p:nvSpPr>
+        <p:spPr>
+          <a:xfrm>
+            <a:off x="685800" y="4343400"/>
+            <a:ext cx="5486400" cy="4114800"/>
+          </a:xfrm>
+          <a:prstGeom prst="rect">
+            <a:avLst/>
+          </a:prstGeom>
+        </p:spPr>
+        <p:txBody>
+          <a:bodyPr spcFirstLastPara="1" wrap="square" lIns="91425" tIns="91425" rIns="91425" bIns="91425" anchor="t" anchorCtr="0">
+            <a:noAutofit/>
+          </a:bodyPr>
+          <a:lstStyle/>
+          <a:p>
+            <a:pPr marL="0" lvl="0" indent="0" algn="l" rtl="0">
+              <a:spcBef>
+                <a:spcPts val="0"/>
+              </a:spcBef>
+              <a:spcAft>
+                <a:spcPts val="0"/>
+              </a:spcAft>
+              <a:buNone/>
+            </a:pPr>
+            <a:endParaRPr/>
+          </a:p>
+        </p:txBody>
+      </p:sp>
+      <p:sp>
+        <p:nvSpPr>
+          <p:cNvPr id="135" name="Google Shape;135;p12:notes"/>
+          <p:cNvSpPr>
+            <a:spLocks noGrp="1" noRot="1" noChangeAspect="1"/>
+          </p:cNvSpPr>
+          <p:nvPr>
+            <p:ph type="sldImg" idx="2"/>
+          </p:nvPr>
+        </p:nvSpPr>
+        <p:spPr>
+          <a:xfrm>
+            <a:off x="1143000" y="685800"/>
+            <a:ext cx="4572000" cy="3429000"/>
+          </a:xfrm>
+          <a:custGeom>
+            <a:avLst/>
+            <a:gdLst/>
+            <a:ahLst/>
+            <a:cxnLst/>
+            <a:rect l="l" t="t" r="r" b="b"/>
+            <a:pathLst>
+              <a:path w="120000" h="120000" extrusionOk="0">
+                <a:moveTo>
+                  <a:pt x="0" y="0"/>
+                </a:moveTo>
+                <a:lnTo>
+                  <a:pt x="120000" y="0"/>
+                </a:lnTo>
+                <a:lnTo>
+                  <a:pt x="120000" y="120000"/>
+                </a:lnTo>
+                <a:lnTo>
+                  <a:pt x="0" y="120000"/>
+                </a:lnTo>
+                <a:close/>
+              </a:path>
+            </a:pathLst>
+          </a:custGeom>
+        </p:spPr>
+      </p:sp>
+    </p:spTree>
+  </p:cSld>
+  <p:clrMapOvr>
+    <a:masterClrMapping/>
+  </p:clrMapOvr>
+</p:notes>
+</file>
+
+<file path=ppt/notesSlides/notesSlide19.xml><?xml version="1.0" encoding="utf-8"?>
+<p:notes xmlns:a="http://schemas.openxmlformats.org/drawingml/2006/main" xmlns:r="http://schemas.openxmlformats.org/officeDocument/2006/relationships" xmlns:p="http://schemas.openxmlformats.org/presentationml/2006/main" showMasterSp="0" showMasterPhAnim="0">
+  <p:cSld>
+    <p:spTree>
+      <p:nvGrpSpPr>
+        <p:cNvPr id="1" name="Shape 143"/>
+        <p:cNvGrpSpPr/>
+        <p:nvPr/>
+      </p:nvGrpSpPr>
+      <p:grpSpPr>
+        <a:xfrm>
+          <a:off x="0" y="0"/>
+          <a:ext cx="0" cy="0"/>
+          <a:chOff x="0" y="0"/>
+          <a:chExt cx="0" cy="0"/>
+        </a:xfrm>
+      </p:grpSpPr>
+      <p:sp>
+        <p:nvSpPr>
+          <p:cNvPr id="144" name="Google Shape;144;p13:notes"/>
+          <p:cNvSpPr txBox="1">
+            <a:spLocks noGrp="1"/>
+          </p:cNvSpPr>
+          <p:nvPr>
+            <p:ph type="body" idx="1"/>
+          </p:nvPr>
+        </p:nvSpPr>
+        <p:spPr>
+          <a:xfrm>
+            <a:off x="685800" y="4343400"/>
+            <a:ext cx="5486400" cy="4114800"/>
+          </a:xfrm>
+          <a:prstGeom prst="rect">
+            <a:avLst/>
+          </a:prstGeom>
+        </p:spPr>
+        <p:txBody>
+          <a:bodyPr spcFirstLastPara="1" wrap="square" lIns="91425" tIns="91425" rIns="91425" bIns="91425" anchor="t" anchorCtr="0">
+            <a:noAutofit/>
+          </a:bodyPr>
+          <a:lstStyle/>
+          <a:p>
+            <a:pPr marL="0" lvl="0" indent="0" algn="l" rtl="0">
+              <a:spcBef>
+                <a:spcPts val="0"/>
+              </a:spcBef>
+              <a:spcAft>
+                <a:spcPts val="0"/>
+              </a:spcAft>
+              <a:buNone/>
+            </a:pPr>
+            <a:endParaRPr/>
+          </a:p>
+        </p:txBody>
+      </p:sp>
+      <p:sp>
+        <p:nvSpPr>
+          <p:cNvPr id="145" name="Google Shape;145;p13:notes"/>
+          <p:cNvSpPr>
+            <a:spLocks noGrp="1" noRot="1" noChangeAspect="1"/>
+          </p:cNvSpPr>
+          <p:nvPr>
+            <p:ph type="sldImg" idx="2"/>
+          </p:nvPr>
+        </p:nvSpPr>
+        <p:spPr>
+          <a:xfrm>
+            <a:off x="1143000" y="685800"/>
+            <a:ext cx="4572000" cy="3429000"/>
+          </a:xfrm>
+          <a:custGeom>
+            <a:avLst/>
+            <a:gdLst/>
+            <a:ahLst/>
+            <a:cxnLst/>
+            <a:rect l="l" t="t" r="r" b="b"/>
+            <a:pathLst>
+              <a:path w="120000" h="120000" extrusionOk="0">
+                <a:moveTo>
+                  <a:pt x="0" y="0"/>
+                </a:moveTo>
+                <a:lnTo>
+                  <a:pt x="120000" y="0"/>
+                </a:lnTo>
+                <a:lnTo>
+                  <a:pt x="120000" y="120000"/>
+                </a:lnTo>
+                <a:lnTo>
+                  <a:pt x="0" y="120000"/>
+                </a:lnTo>
+                <a:close/>
+              </a:path>
+            </a:pathLst>
+          </a:custGeom>
+        </p:spPr>
+      </p:sp>
+    </p:spTree>
+  </p:cSld>
+  <p:clrMapOvr>
+    <a:masterClrMapping/>
+  </p:clrMapOvr>
+</p:notes>
+</file>
+
+<file path=ppt/notesSlides/notesSlide2.xml><?xml version="1.0" encoding="utf-8"?>
 <p:notes xmlns:a="http://schemas.openxmlformats.org/drawingml/2006/main" xmlns:r="http://schemas.openxmlformats.org/officeDocument/2006/relationships" xmlns:p="http://schemas.openxmlformats.org/presentationml/2006/main" showMasterSp="0" showMasterPhAnim="0">
   <p:cSld>
     <p:spTree>
@@ -601,319 +1355,7 @@
 </p:notes>
 </file>
 
-<file path=ppt/notesSlides/notesSlide10.xml><?xml version="1.0" encoding="utf-8"?>
-<p:notes xmlns:a="http://schemas.openxmlformats.org/drawingml/2006/main" xmlns:r="http://schemas.openxmlformats.org/officeDocument/2006/relationships" xmlns:p="http://schemas.openxmlformats.org/presentationml/2006/main" showMasterSp="0" showMasterPhAnim="0">
-  <p:cSld>
-    <p:spTree>
-      <p:nvGrpSpPr>
-        <p:cNvPr id="1" name="Shape 124"/>
-        <p:cNvGrpSpPr/>
-        <p:nvPr/>
-      </p:nvGrpSpPr>
-      <p:grpSpPr>
-        <a:xfrm>
-          <a:off x="0" y="0"/>
-          <a:ext cx="0" cy="0"/>
-          <a:chOff x="0" y="0"/>
-          <a:chExt cx="0" cy="0"/>
-        </a:xfrm>
-      </p:grpSpPr>
-      <p:sp>
-        <p:nvSpPr>
-          <p:cNvPr id="125" name="Google Shape;125;p11:notes"/>
-          <p:cNvSpPr txBox="1">
-            <a:spLocks noGrp="1"/>
-          </p:cNvSpPr>
-          <p:nvPr>
-            <p:ph type="body" idx="1"/>
-          </p:nvPr>
-        </p:nvSpPr>
-        <p:spPr>
-          <a:xfrm>
-            <a:off x="685800" y="4343400"/>
-            <a:ext cx="5486400" cy="4114800"/>
-          </a:xfrm>
-          <a:prstGeom prst="rect">
-            <a:avLst/>
-          </a:prstGeom>
-        </p:spPr>
-        <p:txBody>
-          <a:bodyPr spcFirstLastPara="1" wrap="square" lIns="91425" tIns="91425" rIns="91425" bIns="91425" anchor="t" anchorCtr="0">
-            <a:noAutofit/>
-          </a:bodyPr>
-          <a:lstStyle/>
-          <a:p>
-            <a:pPr marL="0" lvl="0" indent="0" algn="l" rtl="0">
-              <a:spcBef>
-                <a:spcPts val="0"/>
-              </a:spcBef>
-              <a:spcAft>
-                <a:spcPts val="0"/>
-              </a:spcAft>
-              <a:buNone/>
-            </a:pPr>
-            <a:endParaRPr/>
-          </a:p>
-        </p:txBody>
-      </p:sp>
-      <p:sp>
-        <p:nvSpPr>
-          <p:cNvPr id="126" name="Google Shape;126;p11:notes"/>
-          <p:cNvSpPr>
-            <a:spLocks noGrp="1" noRot="1" noChangeAspect="1"/>
-          </p:cNvSpPr>
-          <p:nvPr>
-            <p:ph type="sldImg" idx="2"/>
-          </p:nvPr>
-        </p:nvSpPr>
-        <p:spPr>
-          <a:xfrm>
-            <a:off x="1143000" y="685800"/>
-            <a:ext cx="4572000" cy="3429000"/>
-          </a:xfrm>
-          <a:custGeom>
-            <a:avLst/>
-            <a:gdLst/>
-            <a:ahLst/>
-            <a:cxnLst/>
-            <a:rect l="l" t="t" r="r" b="b"/>
-            <a:pathLst>
-              <a:path w="120000" h="120000" extrusionOk="0">
-                <a:moveTo>
-                  <a:pt x="0" y="0"/>
-                </a:moveTo>
-                <a:lnTo>
-                  <a:pt x="120000" y="0"/>
-                </a:lnTo>
-                <a:lnTo>
-                  <a:pt x="120000" y="120000"/>
-                </a:lnTo>
-                <a:lnTo>
-                  <a:pt x="0" y="120000"/>
-                </a:lnTo>
-                <a:close/>
-              </a:path>
-            </a:pathLst>
-          </a:custGeom>
-        </p:spPr>
-      </p:sp>
-    </p:spTree>
-  </p:cSld>
-  <p:clrMapOvr>
-    <a:masterClrMapping/>
-  </p:clrMapOvr>
-</p:notes>
-</file>
-
-<file path=ppt/notesSlides/notesSlide11.xml><?xml version="1.0" encoding="utf-8"?>
-<p:notes xmlns:a="http://schemas.openxmlformats.org/drawingml/2006/main" xmlns:r="http://schemas.openxmlformats.org/officeDocument/2006/relationships" xmlns:p="http://schemas.openxmlformats.org/presentationml/2006/main" showMasterSp="0" showMasterPhAnim="0">
-  <p:cSld>
-    <p:spTree>
-      <p:nvGrpSpPr>
-        <p:cNvPr id="1" name="Shape 133"/>
-        <p:cNvGrpSpPr/>
-        <p:nvPr/>
-      </p:nvGrpSpPr>
-      <p:grpSpPr>
-        <a:xfrm>
-          <a:off x="0" y="0"/>
-          <a:ext cx="0" cy="0"/>
-          <a:chOff x="0" y="0"/>
-          <a:chExt cx="0" cy="0"/>
-        </a:xfrm>
-      </p:grpSpPr>
-      <p:sp>
-        <p:nvSpPr>
-          <p:cNvPr id="134" name="Google Shape;134;p12:notes"/>
-          <p:cNvSpPr txBox="1">
-            <a:spLocks noGrp="1"/>
-          </p:cNvSpPr>
-          <p:nvPr>
-            <p:ph type="body" idx="1"/>
-          </p:nvPr>
-        </p:nvSpPr>
-        <p:spPr>
-          <a:xfrm>
-            <a:off x="685800" y="4343400"/>
-            <a:ext cx="5486400" cy="4114800"/>
-          </a:xfrm>
-          <a:prstGeom prst="rect">
-            <a:avLst/>
-          </a:prstGeom>
-        </p:spPr>
-        <p:txBody>
-          <a:bodyPr spcFirstLastPara="1" wrap="square" lIns="91425" tIns="91425" rIns="91425" bIns="91425" anchor="t" anchorCtr="0">
-            <a:noAutofit/>
-          </a:bodyPr>
-          <a:lstStyle/>
-          <a:p>
-            <a:pPr marL="0" lvl="0" indent="0" algn="l" rtl="0">
-              <a:spcBef>
-                <a:spcPts val="0"/>
-              </a:spcBef>
-              <a:spcAft>
-                <a:spcPts val="0"/>
-              </a:spcAft>
-              <a:buNone/>
-            </a:pPr>
-            <a:endParaRPr/>
-          </a:p>
-        </p:txBody>
-      </p:sp>
-      <p:sp>
-        <p:nvSpPr>
-          <p:cNvPr id="135" name="Google Shape;135;p12:notes"/>
-          <p:cNvSpPr>
-            <a:spLocks noGrp="1" noRot="1" noChangeAspect="1"/>
-          </p:cNvSpPr>
-          <p:nvPr>
-            <p:ph type="sldImg" idx="2"/>
-          </p:nvPr>
-        </p:nvSpPr>
-        <p:spPr>
-          <a:xfrm>
-            <a:off x="1143000" y="685800"/>
-            <a:ext cx="4572000" cy="3429000"/>
-          </a:xfrm>
-          <a:custGeom>
-            <a:avLst/>
-            <a:gdLst/>
-            <a:ahLst/>
-            <a:cxnLst/>
-            <a:rect l="l" t="t" r="r" b="b"/>
-            <a:pathLst>
-              <a:path w="120000" h="120000" extrusionOk="0">
-                <a:moveTo>
-                  <a:pt x="0" y="0"/>
-                </a:moveTo>
-                <a:lnTo>
-                  <a:pt x="120000" y="0"/>
-                </a:lnTo>
-                <a:lnTo>
-                  <a:pt x="120000" y="120000"/>
-                </a:lnTo>
-                <a:lnTo>
-                  <a:pt x="0" y="120000"/>
-                </a:lnTo>
-                <a:close/>
-              </a:path>
-            </a:pathLst>
-          </a:custGeom>
-        </p:spPr>
-      </p:sp>
-    </p:spTree>
-  </p:cSld>
-  <p:clrMapOvr>
-    <a:masterClrMapping/>
-  </p:clrMapOvr>
-</p:notes>
-</file>
-
-<file path=ppt/notesSlides/notesSlide12.xml><?xml version="1.0" encoding="utf-8"?>
-<p:notes xmlns:a="http://schemas.openxmlformats.org/drawingml/2006/main" xmlns:r="http://schemas.openxmlformats.org/officeDocument/2006/relationships" xmlns:p="http://schemas.openxmlformats.org/presentationml/2006/main" showMasterSp="0" showMasterPhAnim="0">
-  <p:cSld>
-    <p:spTree>
-      <p:nvGrpSpPr>
-        <p:cNvPr id="1" name="Shape 143"/>
-        <p:cNvGrpSpPr/>
-        <p:nvPr/>
-      </p:nvGrpSpPr>
-      <p:grpSpPr>
-        <a:xfrm>
-          <a:off x="0" y="0"/>
-          <a:ext cx="0" cy="0"/>
-          <a:chOff x="0" y="0"/>
-          <a:chExt cx="0" cy="0"/>
-        </a:xfrm>
-      </p:grpSpPr>
-      <p:sp>
-        <p:nvSpPr>
-          <p:cNvPr id="144" name="Google Shape;144;p13:notes"/>
-          <p:cNvSpPr txBox="1">
-            <a:spLocks noGrp="1"/>
-          </p:cNvSpPr>
-          <p:nvPr>
-            <p:ph type="body" idx="1"/>
-          </p:nvPr>
-        </p:nvSpPr>
-        <p:spPr>
-          <a:xfrm>
-            <a:off x="685800" y="4343400"/>
-            <a:ext cx="5486400" cy="4114800"/>
-          </a:xfrm>
-          <a:prstGeom prst="rect">
-            <a:avLst/>
-          </a:prstGeom>
-        </p:spPr>
-        <p:txBody>
-          <a:bodyPr spcFirstLastPara="1" wrap="square" lIns="91425" tIns="91425" rIns="91425" bIns="91425" anchor="t" anchorCtr="0">
-            <a:noAutofit/>
-          </a:bodyPr>
-          <a:lstStyle/>
-          <a:p>
-            <a:pPr marL="0" lvl="0" indent="0" algn="l" rtl="0">
-              <a:spcBef>
-                <a:spcPts val="0"/>
-              </a:spcBef>
-              <a:spcAft>
-                <a:spcPts val="0"/>
-              </a:spcAft>
-              <a:buNone/>
-            </a:pPr>
-            <a:endParaRPr/>
-          </a:p>
-        </p:txBody>
-      </p:sp>
-      <p:sp>
-        <p:nvSpPr>
-          <p:cNvPr id="145" name="Google Shape;145;p13:notes"/>
-          <p:cNvSpPr>
-            <a:spLocks noGrp="1" noRot="1" noChangeAspect="1"/>
-          </p:cNvSpPr>
-          <p:nvPr>
-            <p:ph type="sldImg" idx="2"/>
-          </p:nvPr>
-        </p:nvSpPr>
-        <p:spPr>
-          <a:xfrm>
-            <a:off x="1143000" y="685800"/>
-            <a:ext cx="4572000" cy="3429000"/>
-          </a:xfrm>
-          <a:custGeom>
-            <a:avLst/>
-            <a:gdLst/>
-            <a:ahLst/>
-            <a:cxnLst/>
-            <a:rect l="l" t="t" r="r" b="b"/>
-            <a:pathLst>
-              <a:path w="120000" h="120000" extrusionOk="0">
-                <a:moveTo>
-                  <a:pt x="0" y="0"/>
-                </a:moveTo>
-                <a:lnTo>
-                  <a:pt x="120000" y="0"/>
-                </a:lnTo>
-                <a:lnTo>
-                  <a:pt x="120000" y="120000"/>
-                </a:lnTo>
-                <a:lnTo>
-                  <a:pt x="0" y="120000"/>
-                </a:lnTo>
-                <a:close/>
-              </a:path>
-            </a:pathLst>
-          </a:custGeom>
-        </p:spPr>
-      </p:sp>
-    </p:spTree>
-  </p:cSld>
-  <p:clrMapOvr>
-    <a:masterClrMapping/>
-  </p:clrMapOvr>
-</p:notes>
-</file>
-
-<file path=ppt/notesSlides/notesSlide13.xml><?xml version="1.0" encoding="utf-8"?>
+<file path=ppt/notesSlides/notesSlide20.xml><?xml version="1.0" encoding="utf-8"?>
 <p:notes xmlns:a="http://schemas.openxmlformats.org/drawingml/2006/main" xmlns:r="http://schemas.openxmlformats.org/officeDocument/2006/relationships" xmlns:p="http://schemas.openxmlformats.org/presentationml/2006/main" showMasterSp="0" showMasterPhAnim="0">
   <p:cSld>
     <p:spTree>
@@ -1017,7 +1459,7 @@
 </p:notes>
 </file>
 
-<file path=ppt/notesSlides/notesSlide14.xml><?xml version="1.0" encoding="utf-8"?>
+<file path=ppt/notesSlides/notesSlide21.xml><?xml version="1.0" encoding="utf-8"?>
 <p:notes xmlns:a="http://schemas.openxmlformats.org/drawingml/2006/main" xmlns:r="http://schemas.openxmlformats.org/officeDocument/2006/relationships" xmlns:p="http://schemas.openxmlformats.org/presentationml/2006/main" showMasterSp="0" showMasterPhAnim="0">
   <p:cSld>
     <p:spTree>
@@ -1121,7 +1563,7 @@
 </p:notes>
 </file>
 
-<file path=ppt/notesSlides/notesSlide15.xml><?xml version="1.0" encoding="utf-8"?>
+<file path=ppt/notesSlides/notesSlide22.xml><?xml version="1.0" encoding="utf-8"?>
 <p:notes xmlns:a="http://schemas.openxmlformats.org/drawingml/2006/main" xmlns:r="http://schemas.openxmlformats.org/officeDocument/2006/relationships" xmlns:p="http://schemas.openxmlformats.org/presentationml/2006/main" showMasterSp="0" showMasterPhAnim="0">
   <p:cSld>
     <p:spTree>
@@ -1225,7 +1667,7 @@
 </p:notes>
 </file>
 
-<file path=ppt/notesSlides/notesSlide16.xml><?xml version="1.0" encoding="utf-8"?>
+<file path=ppt/notesSlides/notesSlide23.xml><?xml version="1.0" encoding="utf-8"?>
 <p:notes xmlns:a="http://schemas.openxmlformats.org/drawingml/2006/main" xmlns:r="http://schemas.openxmlformats.org/officeDocument/2006/relationships" xmlns:p="http://schemas.openxmlformats.org/presentationml/2006/main" showMasterSp="0" showMasterPhAnim="0">
   <p:cSld>
     <p:spTree>
@@ -1329,7 +1771,7 @@
 </p:notes>
 </file>
 
-<file path=ppt/notesSlides/notesSlide2.xml><?xml version="1.0" encoding="utf-8"?>
+<file path=ppt/notesSlides/notesSlide3.xml><?xml version="1.0" encoding="utf-8"?>
 <p:notes xmlns:a="http://schemas.openxmlformats.org/drawingml/2006/main" xmlns:r="http://schemas.openxmlformats.org/officeDocument/2006/relationships" xmlns:p="http://schemas.openxmlformats.org/presentationml/2006/main" showMasterSp="0" showMasterPhAnim="0">
   <p:cSld>
     <p:spTree>
@@ -1433,7 +1875,7 @@
 </p:notes>
 </file>
 
-<file path=ppt/notesSlides/notesSlide3.xml><?xml version="1.0" encoding="utf-8"?>
+<file path=ppt/notesSlides/notesSlide6.xml><?xml version="1.0" encoding="utf-8"?>
 <p:notes xmlns:a="http://schemas.openxmlformats.org/drawingml/2006/main" xmlns:r="http://schemas.openxmlformats.org/officeDocument/2006/relationships" xmlns:p="http://schemas.openxmlformats.org/presentationml/2006/main" showMasterSp="0" showMasterPhAnim="0">
   <p:cSld>
     <p:spTree>
@@ -1537,7 +1979,7 @@
 </p:notes>
 </file>
 
-<file path=ppt/notesSlides/notesSlide4.xml><?xml version="1.0" encoding="utf-8"?>
+<file path=ppt/notesSlides/notesSlide7.xml><?xml version="1.0" encoding="utf-8"?>
 <p:notes xmlns:a="http://schemas.openxmlformats.org/drawingml/2006/main" xmlns:r="http://schemas.openxmlformats.org/officeDocument/2006/relationships" xmlns:p="http://schemas.openxmlformats.org/presentationml/2006/main" showMasterSp="0" showMasterPhAnim="0">
   <p:cSld>
     <p:spTree>
@@ -1641,7 +2083,7 @@
 </p:notes>
 </file>
 
-<file path=ppt/notesSlides/notesSlide5.xml><?xml version="1.0" encoding="utf-8"?>
+<file path=ppt/notesSlides/notesSlide9.xml><?xml version="1.0" encoding="utf-8"?>
 <p:notes xmlns:a="http://schemas.openxmlformats.org/drawingml/2006/main" xmlns:r="http://schemas.openxmlformats.org/officeDocument/2006/relationships" xmlns:p="http://schemas.openxmlformats.org/presentationml/2006/main" showMasterSp="0" showMasterPhAnim="0">
   <p:cSld>
     <p:spTree>
@@ -1699,422 +2141,6 @@
       <p:sp>
         <p:nvSpPr>
           <p:cNvPr id="77" name="Google Shape;77;p6:notes"/>
-          <p:cNvSpPr>
-            <a:spLocks noGrp="1" noRot="1" noChangeAspect="1"/>
-          </p:cNvSpPr>
-          <p:nvPr>
-            <p:ph type="sldImg" idx="2"/>
-          </p:nvPr>
-        </p:nvSpPr>
-        <p:spPr>
-          <a:xfrm>
-            <a:off x="1143000" y="685800"/>
-            <a:ext cx="4572000" cy="3429000"/>
-          </a:xfrm>
-          <a:custGeom>
-            <a:avLst/>
-            <a:gdLst/>
-            <a:ahLst/>
-            <a:cxnLst/>
-            <a:rect l="l" t="t" r="r" b="b"/>
-            <a:pathLst>
-              <a:path w="120000" h="120000" extrusionOk="0">
-                <a:moveTo>
-                  <a:pt x="0" y="0"/>
-                </a:moveTo>
-                <a:lnTo>
-                  <a:pt x="120000" y="0"/>
-                </a:lnTo>
-                <a:lnTo>
-                  <a:pt x="120000" y="120000"/>
-                </a:lnTo>
-                <a:lnTo>
-                  <a:pt x="0" y="120000"/>
-                </a:lnTo>
-                <a:close/>
-              </a:path>
-            </a:pathLst>
-          </a:custGeom>
-        </p:spPr>
-      </p:sp>
-    </p:spTree>
-  </p:cSld>
-  <p:clrMapOvr>
-    <a:masterClrMapping/>
-  </p:clrMapOvr>
-</p:notes>
-</file>
-
-<file path=ppt/notesSlides/notesSlide6.xml><?xml version="1.0" encoding="utf-8"?>
-<p:notes xmlns:a="http://schemas.openxmlformats.org/drawingml/2006/main" xmlns:r="http://schemas.openxmlformats.org/officeDocument/2006/relationships" xmlns:p="http://schemas.openxmlformats.org/presentationml/2006/main" showMasterSp="0" showMasterPhAnim="0">
-  <p:cSld>
-    <p:spTree>
-      <p:nvGrpSpPr>
-        <p:cNvPr id="1" name="Shape 85"/>
-        <p:cNvGrpSpPr/>
-        <p:nvPr/>
-      </p:nvGrpSpPr>
-      <p:grpSpPr>
-        <a:xfrm>
-          <a:off x="0" y="0"/>
-          <a:ext cx="0" cy="0"/>
-          <a:chOff x="0" y="0"/>
-          <a:chExt cx="0" cy="0"/>
-        </a:xfrm>
-      </p:grpSpPr>
-      <p:sp>
-        <p:nvSpPr>
-          <p:cNvPr id="86" name="Google Shape;86;p7:notes"/>
-          <p:cNvSpPr txBox="1">
-            <a:spLocks noGrp="1"/>
-          </p:cNvSpPr>
-          <p:nvPr>
-            <p:ph type="body" idx="1"/>
-          </p:nvPr>
-        </p:nvSpPr>
-        <p:spPr>
-          <a:xfrm>
-            <a:off x="685800" y="4343400"/>
-            <a:ext cx="5486400" cy="4114800"/>
-          </a:xfrm>
-          <a:prstGeom prst="rect">
-            <a:avLst/>
-          </a:prstGeom>
-        </p:spPr>
-        <p:txBody>
-          <a:bodyPr spcFirstLastPara="1" wrap="square" lIns="91425" tIns="91425" rIns="91425" bIns="91425" anchor="t" anchorCtr="0">
-            <a:noAutofit/>
-          </a:bodyPr>
-          <a:lstStyle/>
-          <a:p>
-            <a:pPr marL="0" lvl="0" indent="0" algn="l" rtl="0">
-              <a:spcBef>
-                <a:spcPts val="0"/>
-              </a:spcBef>
-              <a:spcAft>
-                <a:spcPts val="0"/>
-              </a:spcAft>
-              <a:buNone/>
-            </a:pPr>
-            <a:endParaRPr/>
-          </a:p>
-        </p:txBody>
-      </p:sp>
-      <p:sp>
-        <p:nvSpPr>
-          <p:cNvPr id="87" name="Google Shape;87;p7:notes"/>
-          <p:cNvSpPr>
-            <a:spLocks noGrp="1" noRot="1" noChangeAspect="1"/>
-          </p:cNvSpPr>
-          <p:nvPr>
-            <p:ph type="sldImg" idx="2"/>
-          </p:nvPr>
-        </p:nvSpPr>
-        <p:spPr>
-          <a:xfrm>
-            <a:off x="1143000" y="685800"/>
-            <a:ext cx="4572000" cy="3429000"/>
-          </a:xfrm>
-          <a:custGeom>
-            <a:avLst/>
-            <a:gdLst/>
-            <a:ahLst/>
-            <a:cxnLst/>
-            <a:rect l="l" t="t" r="r" b="b"/>
-            <a:pathLst>
-              <a:path w="120000" h="120000" extrusionOk="0">
-                <a:moveTo>
-                  <a:pt x="0" y="0"/>
-                </a:moveTo>
-                <a:lnTo>
-                  <a:pt x="120000" y="0"/>
-                </a:lnTo>
-                <a:lnTo>
-                  <a:pt x="120000" y="120000"/>
-                </a:lnTo>
-                <a:lnTo>
-                  <a:pt x="0" y="120000"/>
-                </a:lnTo>
-                <a:close/>
-              </a:path>
-            </a:pathLst>
-          </a:custGeom>
-        </p:spPr>
-      </p:sp>
-    </p:spTree>
-  </p:cSld>
-  <p:clrMapOvr>
-    <a:masterClrMapping/>
-  </p:clrMapOvr>
-</p:notes>
-</file>
-
-<file path=ppt/notesSlides/notesSlide7.xml><?xml version="1.0" encoding="utf-8"?>
-<p:notes xmlns:a="http://schemas.openxmlformats.org/drawingml/2006/main" xmlns:r="http://schemas.openxmlformats.org/officeDocument/2006/relationships" xmlns:p="http://schemas.openxmlformats.org/presentationml/2006/main" showMasterSp="0" showMasterPhAnim="0">
-  <p:cSld>
-    <p:spTree>
-      <p:nvGrpSpPr>
-        <p:cNvPr id="1" name="Shape 95"/>
-        <p:cNvGrpSpPr/>
-        <p:nvPr/>
-      </p:nvGrpSpPr>
-      <p:grpSpPr>
-        <a:xfrm>
-          <a:off x="0" y="0"/>
-          <a:ext cx="0" cy="0"/>
-          <a:chOff x="0" y="0"/>
-          <a:chExt cx="0" cy="0"/>
-        </a:xfrm>
-      </p:grpSpPr>
-      <p:sp>
-        <p:nvSpPr>
-          <p:cNvPr id="96" name="Google Shape;96;p8:notes"/>
-          <p:cNvSpPr txBox="1">
-            <a:spLocks noGrp="1"/>
-          </p:cNvSpPr>
-          <p:nvPr>
-            <p:ph type="body" idx="1"/>
-          </p:nvPr>
-        </p:nvSpPr>
-        <p:spPr>
-          <a:xfrm>
-            <a:off x="685800" y="4343400"/>
-            <a:ext cx="5486400" cy="4114800"/>
-          </a:xfrm>
-          <a:prstGeom prst="rect">
-            <a:avLst/>
-          </a:prstGeom>
-        </p:spPr>
-        <p:txBody>
-          <a:bodyPr spcFirstLastPara="1" wrap="square" lIns="91425" tIns="91425" rIns="91425" bIns="91425" anchor="t" anchorCtr="0">
-            <a:noAutofit/>
-          </a:bodyPr>
-          <a:lstStyle/>
-          <a:p>
-            <a:pPr marL="0" lvl="0" indent="0" algn="l" rtl="0">
-              <a:spcBef>
-                <a:spcPts val="0"/>
-              </a:spcBef>
-              <a:spcAft>
-                <a:spcPts val="0"/>
-              </a:spcAft>
-              <a:buNone/>
-            </a:pPr>
-            <a:endParaRPr/>
-          </a:p>
-        </p:txBody>
-      </p:sp>
-      <p:sp>
-        <p:nvSpPr>
-          <p:cNvPr id="97" name="Google Shape;97;p8:notes"/>
-          <p:cNvSpPr>
-            <a:spLocks noGrp="1" noRot="1" noChangeAspect="1"/>
-          </p:cNvSpPr>
-          <p:nvPr>
-            <p:ph type="sldImg" idx="2"/>
-          </p:nvPr>
-        </p:nvSpPr>
-        <p:spPr>
-          <a:xfrm>
-            <a:off x="1143000" y="685800"/>
-            <a:ext cx="4572000" cy="3429000"/>
-          </a:xfrm>
-          <a:custGeom>
-            <a:avLst/>
-            <a:gdLst/>
-            <a:ahLst/>
-            <a:cxnLst/>
-            <a:rect l="l" t="t" r="r" b="b"/>
-            <a:pathLst>
-              <a:path w="120000" h="120000" extrusionOk="0">
-                <a:moveTo>
-                  <a:pt x="0" y="0"/>
-                </a:moveTo>
-                <a:lnTo>
-                  <a:pt x="120000" y="0"/>
-                </a:lnTo>
-                <a:lnTo>
-                  <a:pt x="120000" y="120000"/>
-                </a:lnTo>
-                <a:lnTo>
-                  <a:pt x="0" y="120000"/>
-                </a:lnTo>
-                <a:close/>
-              </a:path>
-            </a:pathLst>
-          </a:custGeom>
-        </p:spPr>
-      </p:sp>
-    </p:spTree>
-  </p:cSld>
-  <p:clrMapOvr>
-    <a:masterClrMapping/>
-  </p:clrMapOvr>
-</p:notes>
-</file>
-
-<file path=ppt/notesSlides/notesSlide8.xml><?xml version="1.0" encoding="utf-8"?>
-<p:notes xmlns:a="http://schemas.openxmlformats.org/drawingml/2006/main" xmlns:r="http://schemas.openxmlformats.org/officeDocument/2006/relationships" xmlns:p="http://schemas.openxmlformats.org/presentationml/2006/main" showMasterSp="0" showMasterPhAnim="0">
-  <p:cSld>
-    <p:spTree>
-      <p:nvGrpSpPr>
-        <p:cNvPr id="1" name="Shape 105"/>
-        <p:cNvGrpSpPr/>
-        <p:nvPr/>
-      </p:nvGrpSpPr>
-      <p:grpSpPr>
-        <a:xfrm>
-          <a:off x="0" y="0"/>
-          <a:ext cx="0" cy="0"/>
-          <a:chOff x="0" y="0"/>
-          <a:chExt cx="0" cy="0"/>
-        </a:xfrm>
-      </p:grpSpPr>
-      <p:sp>
-        <p:nvSpPr>
-          <p:cNvPr id="106" name="Google Shape;106;p9:notes"/>
-          <p:cNvSpPr txBox="1">
-            <a:spLocks noGrp="1"/>
-          </p:cNvSpPr>
-          <p:nvPr>
-            <p:ph type="body" idx="1"/>
-          </p:nvPr>
-        </p:nvSpPr>
-        <p:spPr>
-          <a:xfrm>
-            <a:off x="685800" y="4343400"/>
-            <a:ext cx="5486400" cy="4114800"/>
-          </a:xfrm>
-          <a:prstGeom prst="rect">
-            <a:avLst/>
-          </a:prstGeom>
-        </p:spPr>
-        <p:txBody>
-          <a:bodyPr spcFirstLastPara="1" wrap="square" lIns="91425" tIns="91425" rIns="91425" bIns="91425" anchor="t" anchorCtr="0">
-            <a:noAutofit/>
-          </a:bodyPr>
-          <a:lstStyle/>
-          <a:p>
-            <a:pPr marL="0" lvl="0" indent="0" algn="l" rtl="0">
-              <a:spcBef>
-                <a:spcPts val="0"/>
-              </a:spcBef>
-              <a:spcAft>
-                <a:spcPts val="0"/>
-              </a:spcAft>
-              <a:buNone/>
-            </a:pPr>
-            <a:endParaRPr/>
-          </a:p>
-        </p:txBody>
-      </p:sp>
-      <p:sp>
-        <p:nvSpPr>
-          <p:cNvPr id="107" name="Google Shape;107;p9:notes"/>
-          <p:cNvSpPr>
-            <a:spLocks noGrp="1" noRot="1" noChangeAspect="1"/>
-          </p:cNvSpPr>
-          <p:nvPr>
-            <p:ph type="sldImg" idx="2"/>
-          </p:nvPr>
-        </p:nvSpPr>
-        <p:spPr>
-          <a:xfrm>
-            <a:off x="1143000" y="685800"/>
-            <a:ext cx="4572000" cy="3429000"/>
-          </a:xfrm>
-          <a:custGeom>
-            <a:avLst/>
-            <a:gdLst/>
-            <a:ahLst/>
-            <a:cxnLst/>
-            <a:rect l="l" t="t" r="r" b="b"/>
-            <a:pathLst>
-              <a:path w="120000" h="120000" extrusionOk="0">
-                <a:moveTo>
-                  <a:pt x="0" y="0"/>
-                </a:moveTo>
-                <a:lnTo>
-                  <a:pt x="120000" y="0"/>
-                </a:lnTo>
-                <a:lnTo>
-                  <a:pt x="120000" y="120000"/>
-                </a:lnTo>
-                <a:lnTo>
-                  <a:pt x="0" y="120000"/>
-                </a:lnTo>
-                <a:close/>
-              </a:path>
-            </a:pathLst>
-          </a:custGeom>
-        </p:spPr>
-      </p:sp>
-    </p:spTree>
-  </p:cSld>
-  <p:clrMapOvr>
-    <a:masterClrMapping/>
-  </p:clrMapOvr>
-</p:notes>
-</file>
-
-<file path=ppt/notesSlides/notesSlide9.xml><?xml version="1.0" encoding="utf-8"?>
-<p:notes xmlns:a="http://schemas.openxmlformats.org/drawingml/2006/main" xmlns:r="http://schemas.openxmlformats.org/officeDocument/2006/relationships" xmlns:p="http://schemas.openxmlformats.org/presentationml/2006/main" showMasterSp="0" showMasterPhAnim="0">
-  <p:cSld>
-    <p:spTree>
-      <p:nvGrpSpPr>
-        <p:cNvPr id="1" name="Shape 114"/>
-        <p:cNvGrpSpPr/>
-        <p:nvPr/>
-      </p:nvGrpSpPr>
-      <p:grpSpPr>
-        <a:xfrm>
-          <a:off x="0" y="0"/>
-          <a:ext cx="0" cy="0"/>
-          <a:chOff x="0" y="0"/>
-          <a:chExt cx="0" cy="0"/>
-        </a:xfrm>
-      </p:grpSpPr>
-      <p:sp>
-        <p:nvSpPr>
-          <p:cNvPr id="115" name="Google Shape;115;p10:notes"/>
-          <p:cNvSpPr txBox="1">
-            <a:spLocks noGrp="1"/>
-          </p:cNvSpPr>
-          <p:nvPr>
-            <p:ph type="body" idx="1"/>
-          </p:nvPr>
-        </p:nvSpPr>
-        <p:spPr>
-          <a:xfrm>
-            <a:off x="685800" y="4343400"/>
-            <a:ext cx="5486400" cy="4114800"/>
-          </a:xfrm>
-          <a:prstGeom prst="rect">
-            <a:avLst/>
-          </a:prstGeom>
-        </p:spPr>
-        <p:txBody>
-          <a:bodyPr spcFirstLastPara="1" wrap="square" lIns="91425" tIns="91425" rIns="91425" bIns="91425" anchor="t" anchorCtr="0">
-            <a:noAutofit/>
-          </a:bodyPr>
-          <a:lstStyle/>
-          <a:p>
-            <a:pPr marL="0" lvl="0" indent="0" algn="l" rtl="0">
-              <a:spcBef>
-                <a:spcPts val="0"/>
-              </a:spcBef>
-              <a:spcAft>
-                <a:spcPts val="0"/>
-              </a:spcAft>
-              <a:buNone/>
-            </a:pPr>
-            <a:endParaRPr/>
-          </a:p>
-        </p:txBody>
-      </p:sp>
-      <p:sp>
-        <p:nvSpPr>
-          <p:cNvPr id="116" name="Google Shape;116;p10:notes"/>
           <p:cNvSpPr>
             <a:spLocks noGrp="1" noRot="1" noChangeAspect="1"/>
           </p:cNvSpPr>
@@ -9785,7 +9811,7 @@
 </file>
 
 <file path=ppt/slides/slide19.xml><?xml version="1.0" encoding="utf-8"?>
-<p:sld xmlns:a="http://schemas.openxmlformats.org/drawingml/2006/main" xmlns:r="http://schemas.openxmlformats.org/officeDocument/2006/relationships" xmlns:p="http://schemas.openxmlformats.org/presentationml/2006/main">
+<p:sld xmlns:a="http://schemas.openxmlformats.org/drawingml/2006/main" xmlns:r="http://schemas.openxmlformats.org/officeDocument/2006/relationships" xmlns:p="http://schemas.openxmlformats.org/presentationml/2006/main" xmlns:p14="http://schemas.microsoft.com/office/powerpoint/2010/main">
   <p:cSld>
     <p:spTree>
       <p:nvGrpSpPr>
@@ -9820,7 +9846,7 @@
         <p:spPr>
           <a:xfrm>
             <a:off x="444500" y="1152525"/>
-            <a:ext cx="7943924" cy="5019675"/>
+            <a:ext cx="7943850" cy="5019675"/>
           </a:xfrm>
         </p:spPr>
         <p:txBody>
@@ -10341,8 +10367,8 @@
         </p:nvSpPr>
         <p:spPr>
           <a:xfrm>
-            <a:off x="896938" y="1412776"/>
-            <a:ext cx="5707062" cy="1054104"/>
+            <a:off x="897255" y="1412875"/>
+            <a:ext cx="5707380" cy="1054735"/>
           </a:xfrm>
           <a:prstGeom prst="rect">
             <a:avLst/>
@@ -10359,76 +10385,108 @@
           </a:ln>
         </p:spPr>
         <p:txBody>
-          <a:bodyPr spcFirstLastPara="1" wrap="square" lIns="68569" tIns="34275" rIns="68569" bIns="34275" anchor="t" anchorCtr="0">
+          <a:bodyPr wrap="square" lIns="68580" tIns="34290" rIns="68580" bIns="34290" numCol="1" vert="horz" anchor="t">
             <a:spAutoFit/>
           </a:bodyPr>
           <a:lstStyle/>
           <a:p>
-            <a:r>
-              <a:rPr lang="en-US" sz="1600" dirty="0">
+            <a:pPr marL="0" indent="0">
+              <a:buFontTx/>
+              <a:buNone/>
+            </a:pPr>
+            <a:r>
+              <a:rPr lang="en-US" sz="1600">
                 <a:solidFill>
                   <a:schemeClr val="dk1"/>
                 </a:solidFill>
-                <a:latin typeface="Tahoma"/>
-                <a:ea typeface="Tahoma"/>
-                <a:cs typeface="Tahoma"/>
-                <a:sym typeface="Tahoma"/>
+                <a:latin typeface="Tahoma" charset="0"/>
+                <a:ea typeface="Tahoma" charset="0"/>
+                <a:cs typeface="Tahoma" charset="0"/>
               </a:rPr>
               <a:t>const button = document.querySelector("#myButton");</a:t>
             </a:r>
-            <a:endParaRPr sz="1600" dirty="0"/>
-          </a:p>
-          <a:p>
-            <a:r>
-              <a:rPr lang="en-US" sz="1600" dirty="0">
-                <a:solidFill>
-                  <a:schemeClr val="dk1"/>
-                </a:solidFill>
-                <a:latin typeface="Tahoma"/>
-                <a:ea typeface="Tahoma"/>
-                <a:cs typeface="Tahoma"/>
-                <a:sym typeface="Tahoma"/>
-              </a:rPr>
-              <a:t>button.addEventListener("click", function() {    </a:t>
-            </a:r>
-            <a:endParaRPr sz="1600" dirty="0"/>
-          </a:p>
-          <a:p>
-            <a:r>
-              <a:rPr lang="en-US" sz="1600" dirty="0">
-                <a:solidFill>
-                  <a:schemeClr val="dk1"/>
-                </a:solidFill>
-                <a:latin typeface="Tahoma"/>
-                <a:ea typeface="Tahoma"/>
-                <a:cs typeface="Tahoma"/>
-                <a:sym typeface="Tahoma"/>
-              </a:rPr>
-              <a:t>      alert("버튼이 클릭되었습니다!");</a:t>
-            </a:r>
-            <a:endParaRPr sz="1600" dirty="0"/>
-          </a:p>
-          <a:p>
-            <a:r>
-              <a:rPr lang="en-US" sz="1600" dirty="0">
-                <a:solidFill>
-                  <a:schemeClr val="dk1"/>
-                </a:solidFill>
-                <a:latin typeface="Tahoma"/>
-                <a:ea typeface="Tahoma"/>
-                <a:cs typeface="Tahoma"/>
-                <a:sym typeface="Tahoma"/>
-              </a:rPr>
-              <a:t>});</a:t>
-            </a:r>
-            <a:endParaRPr sz="1600" dirty="0">
+            <a:endParaRPr lang="ko-KR" altLang="en-US" sz="1600">
               <a:solidFill>
                 <a:schemeClr val="dk1"/>
               </a:solidFill>
-              <a:latin typeface="Tahoma"/>
-              <a:ea typeface="Tahoma"/>
-              <a:cs typeface="Tahoma"/>
-              <a:sym typeface="Tahoma"/>
+              <a:latin typeface="Tahoma" charset="0"/>
+              <a:ea typeface="Tahoma" charset="0"/>
+              <a:cs typeface="Tahoma" charset="0"/>
+            </a:endParaRPr>
+          </a:p>
+          <a:p>
+            <a:pPr marL="0" indent="0">
+              <a:buFontTx/>
+              <a:buNone/>
+            </a:pPr>
+            <a:r>
+              <a:rPr lang="en-US" sz="1600">
+                <a:solidFill>
+                  <a:schemeClr val="dk1"/>
+                </a:solidFill>
+                <a:latin typeface="Tahoma" charset="0"/>
+                <a:ea typeface="Tahoma" charset="0"/>
+                <a:cs typeface="Tahoma" charset="0"/>
+              </a:rPr>
+              <a:t>button.addEventListener("click", function() {    </a:t>
+            </a:r>
+            <a:endParaRPr lang="ko-KR" altLang="en-US" sz="1600">
+              <a:solidFill>
+                <a:schemeClr val="dk1"/>
+              </a:solidFill>
+              <a:latin typeface="Tahoma" charset="0"/>
+              <a:ea typeface="Tahoma" charset="0"/>
+              <a:cs typeface="Tahoma" charset="0"/>
+            </a:endParaRPr>
+          </a:p>
+          <a:p>
+            <a:pPr marL="0" indent="0">
+              <a:buFontTx/>
+              <a:buNone/>
+            </a:pPr>
+            <a:r>
+              <a:rPr lang="en-US" sz="1600">
+                <a:solidFill>
+                  <a:schemeClr val="dk1"/>
+                </a:solidFill>
+                <a:latin typeface="Tahoma" charset="0"/>
+                <a:ea typeface="Tahoma" charset="0"/>
+                <a:cs typeface="Tahoma" charset="0"/>
+              </a:rPr>
+              <a:t>      alert("버튼이 클릭되었습니다!");</a:t>
+            </a:r>
+            <a:endParaRPr lang="ko-KR" altLang="en-US" sz="1600">
+              <a:solidFill>
+                <a:schemeClr val="dk1"/>
+              </a:solidFill>
+              <a:latin typeface="Tahoma" charset="0"/>
+              <a:ea typeface="Tahoma" charset="0"/>
+              <a:cs typeface="Tahoma" charset="0"/>
+            </a:endParaRPr>
+          </a:p>
+          <a:p>
+            <a:pPr marL="0" indent="0">
+              <a:buFontTx/>
+              <a:buNone/>
+            </a:pPr>
+            <a:r>
+              <a:rPr lang="en-US" sz="1600">
+                <a:solidFill>
+                  <a:schemeClr val="dk1"/>
+                </a:solidFill>
+                <a:latin typeface="Tahoma" charset="0"/>
+                <a:ea typeface="Tahoma" charset="0"/>
+                <a:cs typeface="Tahoma" charset="0"/>
+              </a:rPr>
+              <a:t>});</a:t>
+            </a:r>
+            <a:endParaRPr lang="ko-KR" altLang="en-US" sz="1600">
+              <a:solidFill>
+                <a:schemeClr val="dk1"/>
+              </a:solidFill>
+              <a:latin typeface="Tahoma" charset="0"/>
+              <a:ea typeface="Tahoma" charset="0"/>
+              <a:cs typeface="Tahoma" charset="0"/>
             </a:endParaRPr>
           </a:p>
         </p:txBody>
@@ -10576,11 +10634,65 @@
           </a:graphicData>
         </a:graphic>
       </p:graphicFrame>
+      <mc:AlternateContent xmlns:mc="http://schemas.openxmlformats.org/markup-compatibility/2006" xmlns:p14="http://schemas.microsoft.com/office/powerpoint/2010/main">
+        <mc:Choice Requires="p14">
+          <p:contentPart p14:bwMode="auto" r:id="rId3">
+            <p14:nvContentPartPr>
+              <p14:cNvPr id="152" name="잉크 1"/>
+              <p14:cNvContentPartPr/>
+              <p14:nvPr/>
+            </p14:nvContentPartPr>
+            <p14:xfrm>
+              <a:off x="5126355" y="4366260"/>
+              <a:ext cx="720090" cy="760095"/>
+            </p14:xfrm>
+          </p:contentPart>
+        </mc:Choice>
+        <mc:Fallback>
+          <p:pic>
+            <p:nvPicPr>
+              <p:cNvPr id="152" name="잉크 1"/>
+              <p:cNvPicPr/>
+              <p:nvPr/>
+            </p:nvPicPr>
+            <p:blipFill>
+              <a:blip r:embed="rId4"/>
+              <a:stretch>
+                <a:fillRect/>
+              </a:stretch>
+            </p:blipFill>
+            <p:spPr>
+              <a:xfrm>
+                <a:off x="5126355" y="4366260"/>
+                <a:ext cx="720090" cy="760095"/>
+              </a:xfrm>
+              <a:prstGeom prst="rect">
+                <a:avLst/>
+              </a:prstGeom>
+            </p:spPr>
+          </p:pic>
+        </mc:Fallback>
+      </mc:AlternateContent>
     </p:spTree>
   </p:cSld>
   <p:clrMapOvr>
     <a:masterClrMapping/>
   </p:clrMapOvr>
+  <mc:AlternateContent xmlns:mc="http://schemas.openxmlformats.org/markup-compatibility/2006">
+    <mc:Choice xmlns:p14="http://schemas.microsoft.com/office/powerpoint/2010/main" Requires="p14">
+      <p:transition spd="slow" p14:dur="2000"/>
+    </mc:Choice>
+    <mc:Fallback>
+      <p:transition spd="slow"/>
+    </mc:Fallback>
+  </mc:AlternateContent>
+  <p:timing>
+    <p:tnLst>
+      <p:par>
+        <p:cTn id="1" dur="indefinite" restart="never" nodeType="tmRoot"/>
+      </p:par>
+    </p:tnLst>
+  </p:timing>
 </p:sld>
 </file>
 
@@ -11067,7 +11179,7 @@
 </file>
 
 <file path=ppt/slides/slide20.xml><?xml version="1.0" encoding="utf-8"?>
-<p:sld xmlns:a="http://schemas.openxmlformats.org/drawingml/2006/main" xmlns:r="http://schemas.openxmlformats.org/officeDocument/2006/relationships" xmlns:p="http://schemas.openxmlformats.org/presentationml/2006/main">
+<p:sld xmlns:a="http://schemas.openxmlformats.org/drawingml/2006/main" xmlns:r="http://schemas.openxmlformats.org/officeDocument/2006/relationships" xmlns:p="http://schemas.openxmlformats.org/presentationml/2006/main" xmlns:p14="http://schemas.microsoft.com/office/powerpoint/2010/main">
   <p:cSld>
     <p:spTree>
       <p:nvGrpSpPr>
@@ -11143,7 +11255,12 @@
             <p:ph idx="1"/>
           </p:nvPr>
         </p:nvSpPr>
-        <p:spPr/>
+        <p:spPr>
+          <a:xfrm>
+            <a:off x="444500" y="1152525"/>
+            <a:ext cx="7773035" cy="5020310"/>
+          </a:xfrm>
+        </p:spPr>
         <p:txBody>
           <a:bodyPr/>
           <a:lstStyle/>
@@ -11533,11 +11650,206 @@
           </a:p>
         </p:txBody>
       </p:sp>
+      <p:sp>
+        <p:nvSpPr>
+          <p:cNvPr id="169" name="텍스트 상자 1"/>
+          <p:cNvSpPr txBox="1">
+            <a:spLocks/>
+          </p:cNvSpPr>
+          <p:nvPr/>
+        </p:nvSpPr>
+        <p:spPr>
+          <a:xfrm rot="0">
+            <a:off x="1996440" y="4671060"/>
+            <a:ext cx="3850640" cy="370205"/>
+          </a:xfrm>
+          <a:prstGeom prst="rect"/>
+          <a:noFill/>
+          <a:ln>
+            <a:noFill/>
+            <a:prstDash/>
+          </a:ln>
+        </p:spPr>
+        <p:txBody>
+          <a:bodyPr wrap="none" lIns="89535" tIns="46355" rIns="89535" bIns="46355" vert="horz" anchor="t">
+            <a:spAutoFit/>
+          </a:bodyPr>
+          <a:lstStyle/>
+          <a:p>
+            <a:pPr marL="0" indent="0" algn="l" hangingPunct="1"/>
+            <a:r>
+              <a:rPr lang="ko-KR" sz="1800">
+                <a:latin typeface="맑은 고딕" charset="0"/>
+                <a:ea typeface="맑은 고딕" charset="0"/>
+              </a:rPr>
+              <a:t>G</a:t>
+            </a:r>
+            <a:r>
+              <a:rPr lang="ko-KR" sz="1800">
+                <a:latin typeface="맑은 고딕" charset="0"/>
+                <a:ea typeface="맑은 고딕" charset="0"/>
+              </a:rPr>
+              <a:t>ot</a:t>
+            </a:r>
+            <a:r>
+              <a:rPr lang="ko-KR" sz="1800">
+                <a:latin typeface="맑은 고딕" charset="0"/>
+                <a:ea typeface="맑은 고딕" charset="0"/>
+              </a:rPr>
+              <a:t>t</a:t>
+            </a:r>
+            <a:r>
+              <a:rPr lang="ko-KR" sz="1800">
+                <a:latin typeface="맑은 고딕" charset="0"/>
+                <a:ea typeface="맑은 고딕" charset="0"/>
+              </a:rPr>
+              <a:t>a </a:t>
+            </a:r>
+            <a:r>
+              <a:rPr lang="ko-KR" sz="1800">
+                <a:latin typeface="맑은 고딕" charset="0"/>
+                <a:ea typeface="맑은 고딕" charset="0"/>
+              </a:rPr>
+              <a:t>k</a:t>
+            </a:r>
+            <a:r>
+              <a:rPr lang="ko-KR" sz="1800">
+                <a:latin typeface="맑은 고딕" charset="0"/>
+                <a:ea typeface="맑은 고딕" charset="0"/>
+              </a:rPr>
+              <a:t>now : onclick</a:t>
+            </a:r>
+            <a:r>
+              <a:rPr lang="ko-KR" sz="1800">
+                <a:latin typeface="맑은 고딕" charset="0"/>
+                <a:ea typeface="맑은 고딕" charset="0"/>
+              </a:rPr>
+              <a:t>,</a:t>
+            </a:r>
+            <a:r>
+              <a:rPr lang="ko-KR" sz="1800">
+                <a:latin typeface="맑은 고딕" charset="0"/>
+                <a:ea typeface="맑은 고딕" charset="0"/>
+              </a:rPr>
+              <a:t> se</a:t>
+            </a:r>
+            <a:r>
+              <a:rPr lang="ko-KR" sz="1800">
+                <a:latin typeface="맑은 고딕" charset="0"/>
+                <a:ea typeface="맑은 고딕" charset="0"/>
+              </a:rPr>
+              <a:t>l</a:t>
+            </a:r>
+            <a:r>
+              <a:rPr lang="ko-KR" sz="1800">
+                <a:latin typeface="맑은 고딕" charset="0"/>
+                <a:ea typeface="맑은 고딕" charset="0"/>
+              </a:rPr>
+              <a:t>e</a:t>
+            </a:r>
+            <a:r>
+              <a:rPr lang="ko-KR" sz="1800">
+                <a:latin typeface="맑은 고딕" charset="0"/>
+                <a:ea typeface="맑은 고딕" charset="0"/>
+              </a:rPr>
+              <a:t>c</a:t>
+            </a:r>
+            <a:r>
+              <a:rPr lang="ko-KR" sz="1800">
+                <a:latin typeface="맑은 고딕" charset="0"/>
+                <a:ea typeface="맑은 고딕" charset="0"/>
+              </a:rPr>
+              <a:t>t, opti</a:t>
+            </a:r>
+            <a:r>
+              <a:rPr lang="ko-KR" sz="1800">
+                <a:latin typeface="맑은 고딕" charset="0"/>
+                <a:ea typeface="맑은 고딕" charset="0"/>
+              </a:rPr>
+              <a:t>o</a:t>
+            </a:r>
+            <a:r>
+              <a:rPr lang="ko-KR" sz="1800">
+                <a:latin typeface="맑은 고딕" charset="0"/>
+                <a:ea typeface="맑은 고딕" charset="0"/>
+              </a:rPr>
+              <a:t>n</a:t>
+            </a:r>
+            <a:endParaRPr lang="ko-KR" altLang="en-US" sz="1800">
+              <a:latin typeface="맑은 고딕" charset="0"/>
+              <a:ea typeface="맑은 고딕" charset="0"/>
+            </a:endParaRPr>
+          </a:p>
+        </p:txBody>
+      </p:sp>
+      <p:sp>
+        <p:nvSpPr>
+          <p:cNvPr id="170" name="텍스트 상자 2"/>
+          <p:cNvSpPr txBox="1">
+            <a:spLocks/>
+          </p:cNvSpPr>
+          <p:nvPr/>
+        </p:nvSpPr>
+        <p:spPr>
+          <a:xfrm rot="0">
+            <a:off x="1950720" y="5554980"/>
+            <a:ext cx="3164840" cy="370205"/>
+          </a:xfrm>
+          <a:prstGeom prst="rect"/>
+          <a:noFill/>
+          <a:ln>
+            <a:noFill/>
+            <a:prstDash/>
+          </a:ln>
+        </p:spPr>
+        <p:txBody>
+          <a:bodyPr wrap="none" lIns="89535" tIns="46355" rIns="89535" bIns="46355" vert="horz" anchor="t">
+            <a:spAutoFit/>
+          </a:bodyPr>
+          <a:lstStyle/>
+          <a:p>
+            <a:pPr marL="0" indent="0" algn="l" hangingPunct="1"/>
+            <a:r>
+              <a:rPr lang="ko-KR" sz="1800">
+                <a:latin typeface="맑은 고딕" charset="0"/>
+                <a:ea typeface="맑은 고딕" charset="0"/>
+              </a:rPr>
+              <a:t>이런거 </a:t>
+            </a:r>
+            <a:r>
+              <a:rPr lang="ko-KR" sz="1800">
+                <a:latin typeface="맑은 고딕" charset="0"/>
+                <a:ea typeface="맑은 고딕" charset="0"/>
+              </a:rPr>
+              <a:t>기말 실기시험에 나옴</a:t>
+            </a:r>
+            <a:endParaRPr lang="ko-KR" altLang="en-US" sz="1800">
+              <a:latin typeface="맑은 고딕" charset="0"/>
+              <a:ea typeface="맑은 고딕" charset="0"/>
+            </a:endParaRPr>
+          </a:p>
+        </p:txBody>
+      </p:sp>
     </p:spTree>
   </p:cSld>
   <p:clrMapOvr>
     <a:masterClrMapping/>
   </p:clrMapOvr>
+  <mc:AlternateContent xmlns:mc="http://schemas.openxmlformats.org/markup-compatibility/2006">
+    <mc:Choice xmlns:p14="http://schemas.microsoft.com/office/powerpoint/2010/main" Requires="p14">
+      <p:transition spd="slow" p14:dur="2000"/>
+    </mc:Choice>
+    <mc:Fallback>
+      <p:transition spd="slow"/>
+    </mc:Fallback>
+  </mc:AlternateContent>
+  <p:timing>
+    <p:tnLst>
+      <p:par>
+        <p:cTn id="1" dur="indefinite" restart="never" nodeType="tmRoot"/>
+      </p:par>
+    </p:tnLst>
+  </p:timing>
 </p:sld>
 </file>
 
@@ -15528,7 +15840,7 @@
 </file>
 
 <file path=ppt/slides/slide7.xml><?xml version="1.0" encoding="utf-8"?>
-<p:sld xmlns:a="http://schemas.openxmlformats.org/drawingml/2006/main" xmlns:r="http://schemas.openxmlformats.org/officeDocument/2006/relationships" xmlns:p="http://schemas.openxmlformats.org/presentationml/2006/main">
+<p:sld xmlns:a="http://schemas.openxmlformats.org/drawingml/2006/main" xmlns:r="http://schemas.openxmlformats.org/officeDocument/2006/relationships" xmlns:p="http://schemas.openxmlformats.org/presentationml/2006/main" xmlns:p14="http://schemas.microsoft.com/office/powerpoint/2010/main">
   <p:cSld>
     <p:spTree>
       <p:nvGrpSpPr>
@@ -15563,7 +15875,7 @@
         <p:spPr>
           <a:xfrm>
             <a:off x="444500" y="1152525"/>
-            <a:ext cx="7871916" cy="5019675"/>
+            <a:ext cx="7872095" cy="5019675"/>
           </a:xfrm>
         </p:spPr>
         <p:txBody>
@@ -16345,11 +16657,81 @@
           </a:graphicData>
         </a:graphic>
       </p:graphicFrame>
+      <p:sp>
+        <p:nvSpPr>
+          <p:cNvPr id="75" name="텍스트 상자 1"/>
+          <p:cNvSpPr txBox="1">
+            <a:spLocks/>
+          </p:cNvSpPr>
+          <p:nvPr/>
+        </p:nvSpPr>
+        <p:spPr>
+          <a:xfrm rot="0">
+            <a:off x="5574665" y="1479550"/>
+            <a:ext cx="2479040" cy="370205"/>
+          </a:xfrm>
+          <a:prstGeom prst="rect"/>
+          <a:noFill/>
+          <a:ln>
+            <a:noFill/>
+            <a:prstDash/>
+          </a:ln>
+        </p:spPr>
+        <p:txBody>
+          <a:bodyPr wrap="none" lIns="89535" tIns="46355" rIns="89535" bIns="46355" vert="horz" anchor="t">
+            <a:spAutoFit/>
+          </a:bodyPr>
+          <a:lstStyle/>
+          <a:p>
+            <a:pPr marL="0" indent="0" algn="l" hangingPunct="1"/>
+            <a:r>
+              <a:rPr lang="ko-KR" sz="1800">
+                <a:latin typeface="맑은 고딕" charset="0"/>
+                <a:ea typeface="맑은 고딕" charset="0"/>
+              </a:rPr>
+              <a:t>기말에 </a:t>
+            </a:r>
+            <a:r>
+              <a:rPr lang="ko-KR" sz="1800">
+                <a:latin typeface="맑은 고딕" charset="0"/>
+                <a:ea typeface="맑은 고딕" charset="0"/>
+              </a:rPr>
+              <a:t>문법 많이 물</a:t>
+            </a:r>
+            <a:r>
+              <a:rPr lang="ko-KR" sz="1800">
+                <a:latin typeface="맑은 고딕" charset="0"/>
+                <a:ea typeface="맑은 고딕" charset="0"/>
+              </a:rPr>
+              <a:t>음</a:t>
+            </a:r>
+            <a:endParaRPr lang="ko-KR" altLang="en-US" sz="1800">
+              <a:latin typeface="맑은 고딕" charset="0"/>
+              <a:ea typeface="맑은 고딕" charset="0"/>
+            </a:endParaRPr>
+          </a:p>
+        </p:txBody>
+      </p:sp>
     </p:spTree>
   </p:cSld>
   <p:clrMapOvr>
     <a:masterClrMapping/>
   </p:clrMapOvr>
+  <mc:AlternateContent xmlns:mc="http://schemas.openxmlformats.org/markup-compatibility/2006">
+    <mc:Choice xmlns:p14="http://schemas.microsoft.com/office/powerpoint/2010/main" Requires="p14">
+      <p:transition spd="slow" p14:dur="2000"/>
+    </mc:Choice>
+    <mc:Fallback>
+      <p:transition spd="slow"/>
+    </mc:Fallback>
+  </mc:AlternateContent>
+  <p:timing>
+    <p:tnLst>
+      <p:par>
+        <p:cTn id="1" dur="indefinite" restart="never" nodeType="tmRoot"/>
+      </p:par>
+    </p:tnLst>
+  </p:timing>
 </p:sld>
 </file>
 

--- a/1학기/웹 프로그래밍/2026_웹 프로그래밍_part5.pptx
+++ b/1학기/웹 프로그래밍/2026_웹 프로그래밍_part5.pptx
@@ -2,7 +2,7 @@
 <file path=ppt/presentation.xml><?xml version="1.0" encoding="utf-8"?>
 <p:presentation xmlns:a="http://schemas.openxmlformats.org/drawingml/2006/main" xmlns:r="http://schemas.openxmlformats.org/officeDocument/2006/relationships" xmlns:p="http://schemas.openxmlformats.org/presentationml/2006/main" xmlns:p14="http://schemas.microsoft.com/office/powerpoint/2010/main" saveSubsetFonts="1">
   <p:sldMasterIdLst>
-    <p:sldMasterId id="2147483669" r:id="rId5"/>
+    <p:sldMasterId id="2147483671" r:id="rId5"/>
   </p:sldMasterIdLst>
   <p:notesMasterIdLst>
     <p:notesMasterId r:id="rId7"/>
@@ -132,12 +132,12 @@
   <p:extLst>
     <p:ext uri="{EFAFB233-063F-42B5-8137-9DF3F51BA10A}">
       <p15:sldGuideLst xmlns:p15="http://schemas.microsoft.com/office/powerpoint/2012/main">
-        <p15:guide id="1" orient="horz" pos="2157" userDrawn="0">
+        <p15:guide id="1" orient="horz" pos="2156" userDrawn="0">
           <p15:clr>
             <a:srgbClr val="A4A3A4"/>
           </p15:clr>
         </p15:guide>
-        <p15:guide id="2" pos="2877" userDrawn="0">
+        <p15:guide id="2" pos="2876" userDrawn="0">
           <p15:clr>
             <a:srgbClr val="A4A3A4"/>
           </p15:clr>
@@ -10493,142 +10493,133 @@
       </p:sp>
       <p:graphicFrame>
         <p:nvGraphicFramePr>
-          <p:cNvPr id="4" name="Google Shape;160;p14">
-            <a:extLst>
-              <a:ext uri="{FF2B5EF4-FFF2-40B4-BE49-F238E27FC236}">
-                <a16:creationId xmlns:a16="http://schemas.microsoft.com/office/drawing/2014/main" id="{7A081F93-DE36-4010-FDA8-E5463FE8F58A}"/>
-              </a:ext>
-            </a:extLst>
-          </p:cNvPr>
-          <p:cNvGraphicFramePr/>
-          <p:nvPr>
-            <p:extLst>
-              <p:ext uri="{D42A27DB-BD31-4B8C-83A1-F6EECF244321}">
-                <p14:modId xmlns:p14="http://schemas.microsoft.com/office/powerpoint/2010/main" val="2632466915"/>
-              </p:ext>
-            </p:extLst>
-          </p:nvPr>
+          <p:cNvPr id="4" name="Google Shape;160;p14"/>
+          <p:cNvGraphicFramePr>
+            <a:graphicFrameLocks noGrp="1"/>
+          </p:cNvGraphicFramePr>
+          <p:nvPr/>
         </p:nvGraphicFramePr>
         <p:xfrm>
-          <a:off x="835416" y="5147144"/>
-          <a:ext cx="5830106" cy="1135388"/>
+          <a:off x="835660" y="5147310"/>
+          <a:ext cx="5829935" cy="1144905"/>
         </p:xfrm>
         <a:graphic>
           <a:graphicData uri="http://schemas.openxmlformats.org/drawingml/2006/table">
             <a:tbl>
               <a:tblPr firstRow="1" bandRow="1">
-                <a:noFill/>
+                <a:tableStyleId>{00000000-0000-0000-0000-000000000000}</a:tableStyleId>
               </a:tblPr>
               <a:tblGrid>
-                <a:gridCol w="5830106">
-                  <a:extLst>
-                    <a:ext uri="{9D8B030D-6E8A-4147-A177-3AD203B41FA5}">
-                      <a16:colId xmlns:a16="http://schemas.microsoft.com/office/drawing/2014/main" val="20000"/>
-                    </a:ext>
-                  </a:extLst>
-                </a:gridCol>
+                <a:gridCol w="5829935"/>
               </a:tblGrid>
-              <a:tr h="891548">
+              <a:tr h="1144905">
                 <a:tc>
                   <a:txBody>
                     <a:bodyPr/>
                     <a:lstStyle/>
                     <a:p>
-                      <a:pPr marL="0" marR="0" lvl="0" indent="0" algn="l" rtl="0">
+                      <a:pPr marL="0" indent="0" rtl="0" algn="l" lvl="1">
                         <a:spcBef>
                           <a:spcPts val="0"/>
                         </a:spcBef>
                         <a:spcAft>
                           <a:spcPts val="0"/>
                         </a:spcAft>
+                        <a:buFontTx/>
                         <a:buNone/>
                       </a:pPr>
                       <a:r>
-                        <a:rPr lang="en-US" sz="1400" b="0" u="none" strike="noStrike" cap="none" dirty="0"/>
+                        <a:rPr lang="en-US" sz="1400" kern="1200" cap="none" i="0" b="0" strike="noStrike">
+                          <a:solidFill>
+                            <a:schemeClr val="tx1"/>
+                          </a:solidFill>
+                        </a:rPr>
                         <a:t>document.querySelector("#child").addEventListener("click", (event) =&gt; {    </a:t>
                       </a:r>
-                      <a:endParaRPr sz="1400" dirty="0"/>
+                      <a:endParaRPr lang="ko-KR" altLang="en-US" sz="1400" kern="1200" i="0" cap="none" b="0" strike="noStrike">
+                        <a:solidFill>
+                          <a:schemeClr val="tx1"/>
+                        </a:solidFill>
+                      </a:endParaRPr>
                     </a:p>
                     <a:p>
-                      <a:pPr marL="0" marR="0" lvl="0" indent="0" algn="l" rtl="0">
+                      <a:pPr marL="0" indent="0" rtl="0" algn="l" lvl="1">
                         <a:spcBef>
                           <a:spcPts val="0"/>
                         </a:spcBef>
                         <a:spcAft>
                           <a:spcPts val="0"/>
                         </a:spcAft>
+                        <a:buFontTx/>
                         <a:buNone/>
                       </a:pPr>
                       <a:r>
-                        <a:rPr lang="en-US" sz="1400" b="0" u="none" strike="noStrike" cap="none" dirty="0"/>
-                        <a:t>    event.stopPropagation(); // </a:t>
-                      </a:r>
-                      <a:r>
-                        <a:rPr lang="en-US" sz="1400" b="0" u="none" strike="noStrike" cap="none" dirty="0" err="1"/>
-                        <a:t>이벤트</a:t>
-                      </a:r>
-                      <a:r>
-                        <a:rPr lang="en-US" sz="1400" b="0" u="none" strike="noStrike" cap="none" dirty="0"/>
-                        <a:t> </a:t>
-                      </a:r>
-                      <a:r>
-                        <a:rPr lang="en-US" sz="1400" b="0" u="none" strike="noStrike" cap="none" dirty="0" err="1"/>
-                        <a:t>전파</a:t>
-                      </a:r>
-                      <a:r>
-                        <a:rPr lang="en-US" sz="1400" b="0" u="none" strike="noStrike" cap="none" dirty="0"/>
-                        <a:t> </a:t>
-                      </a:r>
-                      <a:r>
-                        <a:rPr lang="en-US" sz="1400" b="0" u="none" strike="noStrike" cap="none" dirty="0" err="1"/>
-                        <a:t>중단</a:t>
-                      </a:r>
-                      <a:r>
-                        <a:rPr lang="en-US" sz="1400" b="0" u="none" strike="noStrike" cap="none" dirty="0"/>
-                        <a:t>    </a:t>
-                      </a:r>
-                      <a:endParaRPr sz="1400" b="0" u="none" strike="noStrike" cap="none" dirty="0"/>
+                        <a:rPr lang="en-US" sz="1400" kern="1200" cap="none" i="0" b="0" strike="noStrike">
+                          <a:solidFill>
+                            <a:schemeClr val="tx1"/>
+                          </a:solidFill>
+                        </a:rPr>
+                        <a:t>    event.stopPropagation(); // 이벤트 전파 중단    </a:t>
+                      </a:r>
+                      <a:endParaRPr lang="ko-KR" altLang="en-US" sz="1400" kern="1200" i="0" cap="none" b="0" strike="noStrike">
+                        <a:solidFill>
+                          <a:schemeClr val="tx1"/>
+                        </a:solidFill>
+                      </a:endParaRPr>
                     </a:p>
                     <a:p>
-                      <a:pPr marL="0" marR="0" lvl="0" indent="0" algn="l" rtl="0">
+                      <a:pPr marL="0" indent="0" rtl="0" algn="l" lvl="1">
                         <a:spcBef>
                           <a:spcPts val="0"/>
                         </a:spcBef>
                         <a:spcAft>
                           <a:spcPts val="0"/>
                         </a:spcAft>
+                        <a:buFontTx/>
                         <a:buNone/>
                       </a:pPr>
                       <a:r>
-                        <a:rPr lang="en-US" sz="1400" b="0" u="none" strike="noStrike" cap="none" dirty="0"/>
+                        <a:rPr lang="en-US" sz="1400" kern="1200" cap="none" i="0" b="0" strike="noStrike">
+                          <a:solidFill>
+                            <a:schemeClr val="tx1"/>
+                          </a:solidFill>
+                        </a:rPr>
                         <a:t>    console.log("Child clicked");</a:t>
                       </a:r>
-                      <a:endParaRPr sz="1400" dirty="0"/>
+                      <a:endParaRPr lang="ko-KR" altLang="en-US" sz="1400" kern="1200" i="0" cap="none" b="0" strike="noStrike">
+                        <a:solidFill>
+                          <a:schemeClr val="tx1"/>
+                        </a:solidFill>
+                      </a:endParaRPr>
                     </a:p>
                     <a:p>
-                      <a:pPr marL="0" marR="0" lvl="0" indent="0" algn="l" rtl="0">
+                      <a:pPr marL="0" indent="0" rtl="0" algn="l" lvl="1">
                         <a:spcBef>
                           <a:spcPts val="0"/>
                         </a:spcBef>
                         <a:spcAft>
                           <a:spcPts val="0"/>
                         </a:spcAft>
+                        <a:buFontTx/>
                         <a:buNone/>
                       </a:pPr>
                       <a:r>
-                        <a:rPr lang="en-US" sz="1400" b="0" u="none" strike="noStrike" cap="none" dirty="0"/>
+                        <a:rPr lang="en-US" sz="1400" kern="1200" cap="none" i="0" b="0" strike="noStrike">
+                          <a:solidFill>
+                            <a:schemeClr val="tx1"/>
+                          </a:solidFill>
+                        </a:rPr>
                         <a:t>});</a:t>
                       </a:r>
-                      <a:endParaRPr sz="1400" b="0" u="none" strike="noStrike" cap="none" dirty="0"/>
+                      <a:endParaRPr lang="ko-KR" altLang="en-US" sz="1400" kern="1200" i="0" cap="none" b="0" strike="noStrike">
+                        <a:solidFill>
+                          <a:schemeClr val="tx1"/>
+                        </a:solidFill>
+                      </a:endParaRPr>
                     </a:p>
                   </a:txBody>
-                  <a:tcPr marL="68588" marR="68588" marT="34294" marB="34294"/>
+                  <a:tcPr marL="68580" marR="68580" marT="34290" marB="34290" anchor="t"/>
                 </a:tc>
-                <a:extLst>
-                  <a:ext uri="{0D108BD9-81ED-4DB2-BD59-A6C34878D82A}">
-                    <a16:rowId xmlns:a16="http://schemas.microsoft.com/office/drawing/2014/main" val="10000"/>
-                  </a:ext>
-                </a:extLst>
               </a:tr>
             </a:tbl>
           </a:graphicData>
@@ -10636,7 +10627,7 @@
       </p:graphicFrame>
       <mc:AlternateContent xmlns:mc="http://schemas.openxmlformats.org/markup-compatibility/2006" xmlns:p14="http://schemas.microsoft.com/office/powerpoint/2010/main">
         <mc:Choice Requires="p14">
-          <p:contentPart p14:bwMode="auto" r:id="rId3">
+          <p:contentPart p14:bwMode="auto" r:id="rId5">
             <p14:nvContentPartPr>
               <p14:cNvPr id="152" name="잉크 1"/>
               <p14:cNvContentPartPr/>
@@ -10656,7 +10647,7 @@
               <p:nvPr/>
             </p:nvPicPr>
             <p:blipFill>
-              <a:blip r:embed="rId4"/>
+              <a:blip r:embed="rId6"/>
               <a:stretch>
                 <a:fillRect/>
               </a:stretch>
